--- a/assets/ppt/PK_CV.pptx
+++ b/assets/ppt/PK_CV.pptx
@@ -243,7 +243,7 @@
           <a:p>
             <a:fld id="{FEA1A487-9522-4098-8ABE-F66374D5ED78}" type="datetimeFigureOut">
               <a:rPr lang="en-US" smtClean="0"/>
-              <a:t>2020-10-08</a:t>
+              <a:t>2020-11-04</a:t>
             </a:fld>
             <a:endParaRPr lang="en-US"/>
           </a:p>
@@ -413,7 +413,7 @@
           <a:p>
             <a:fld id="{FEA1A487-9522-4098-8ABE-F66374D5ED78}" type="datetimeFigureOut">
               <a:rPr lang="en-US" smtClean="0"/>
-              <a:t>2020-10-08</a:t>
+              <a:t>2020-11-04</a:t>
             </a:fld>
             <a:endParaRPr lang="en-US"/>
           </a:p>
@@ -593,7 +593,7 @@
           <a:p>
             <a:fld id="{FEA1A487-9522-4098-8ABE-F66374D5ED78}" type="datetimeFigureOut">
               <a:rPr lang="en-US" smtClean="0"/>
-              <a:t>2020-10-08</a:t>
+              <a:t>2020-11-04</a:t>
             </a:fld>
             <a:endParaRPr lang="en-US"/>
           </a:p>
@@ -763,7 +763,7 @@
           <a:p>
             <a:fld id="{FEA1A487-9522-4098-8ABE-F66374D5ED78}" type="datetimeFigureOut">
               <a:rPr lang="en-US" smtClean="0"/>
-              <a:t>2020-10-08</a:t>
+              <a:t>2020-11-04</a:t>
             </a:fld>
             <a:endParaRPr lang="en-US"/>
           </a:p>
@@ -1007,7 +1007,7 @@
           <a:p>
             <a:fld id="{FEA1A487-9522-4098-8ABE-F66374D5ED78}" type="datetimeFigureOut">
               <a:rPr lang="en-US" smtClean="0"/>
-              <a:t>2020-10-08</a:t>
+              <a:t>2020-11-04</a:t>
             </a:fld>
             <a:endParaRPr lang="en-US"/>
           </a:p>
@@ -1239,7 +1239,7 @@
           <a:p>
             <a:fld id="{FEA1A487-9522-4098-8ABE-F66374D5ED78}" type="datetimeFigureOut">
               <a:rPr lang="en-US" smtClean="0"/>
-              <a:t>2020-10-08</a:t>
+              <a:t>2020-11-04</a:t>
             </a:fld>
             <a:endParaRPr lang="en-US"/>
           </a:p>
@@ -1606,7 +1606,7 @@
           <a:p>
             <a:fld id="{FEA1A487-9522-4098-8ABE-F66374D5ED78}" type="datetimeFigureOut">
               <a:rPr lang="en-US" smtClean="0"/>
-              <a:t>2020-10-08</a:t>
+              <a:t>2020-11-04</a:t>
             </a:fld>
             <a:endParaRPr lang="en-US"/>
           </a:p>
@@ -1724,7 +1724,7 @@
           <a:p>
             <a:fld id="{FEA1A487-9522-4098-8ABE-F66374D5ED78}" type="datetimeFigureOut">
               <a:rPr lang="en-US" smtClean="0"/>
-              <a:t>2020-10-08</a:t>
+              <a:t>2020-11-04</a:t>
             </a:fld>
             <a:endParaRPr lang="en-US"/>
           </a:p>
@@ -1819,7 +1819,7 @@
           <a:p>
             <a:fld id="{FEA1A487-9522-4098-8ABE-F66374D5ED78}" type="datetimeFigureOut">
               <a:rPr lang="en-US" smtClean="0"/>
-              <a:t>2020-10-08</a:t>
+              <a:t>2020-11-04</a:t>
             </a:fld>
             <a:endParaRPr lang="en-US"/>
           </a:p>
@@ -2096,7 +2096,7 @@
           <a:p>
             <a:fld id="{FEA1A487-9522-4098-8ABE-F66374D5ED78}" type="datetimeFigureOut">
               <a:rPr lang="en-US" smtClean="0"/>
-              <a:t>2020-10-08</a:t>
+              <a:t>2020-11-04</a:t>
             </a:fld>
             <a:endParaRPr lang="en-US"/>
           </a:p>
@@ -2353,7 +2353,7 @@
           <a:p>
             <a:fld id="{FEA1A487-9522-4098-8ABE-F66374D5ED78}" type="datetimeFigureOut">
               <a:rPr lang="en-US" smtClean="0"/>
-              <a:t>2020-10-08</a:t>
+              <a:t>2020-11-04</a:t>
             </a:fld>
             <a:endParaRPr lang="en-US"/>
           </a:p>
@@ -2566,7 +2566,7 @@
           <a:p>
             <a:fld id="{FEA1A487-9522-4098-8ABE-F66374D5ED78}" type="datetimeFigureOut">
               <a:rPr lang="en-US" smtClean="0"/>
-              <a:t>2020-10-08</a:t>
+              <a:t>2020-11-04</a:t>
             </a:fld>
             <a:endParaRPr lang="en-US"/>
           </a:p>
@@ -3457,7 +3457,7 @@
                 <a:latin typeface="Poppins Light" panose="00000400000000000000" pitchFamily="2" charset="0"/>
                 <a:cs typeface="Poppins Light" panose="00000400000000000000" pitchFamily="2" charset="0"/>
               </a:rPr>
-              <a:t>Bootstrap</a:t>
+              <a:t>SASS</a:t>
             </a:r>
           </a:p>
           <a:p>
@@ -3475,7 +3475,7 @@
                 <a:latin typeface="Poppins Light" panose="00000400000000000000" pitchFamily="2" charset="0"/>
                 <a:cs typeface="Poppins Light" panose="00000400000000000000" pitchFamily="2" charset="0"/>
               </a:rPr>
-              <a:t>Foundation</a:t>
+              <a:t>Bootstrap</a:t>
             </a:r>
           </a:p>
           <a:p>
@@ -3678,7 +3678,7 @@
                 <a:latin typeface="Poppins Light" panose="00000400000000000000" pitchFamily="2" charset="0"/>
                 <a:cs typeface="Poppins Light" panose="00000400000000000000" pitchFamily="2" charset="0"/>
               </a:rPr>
-              <a:t>MVT</a:t>
+              <a:t>REST API</a:t>
             </a:r>
           </a:p>
         </p:txBody>
@@ -4396,7 +4396,7 @@
         </p:nvSpPr>
         <p:spPr>
           <a:xfrm>
-            <a:off x="3827146" y="2974081"/>
+            <a:off x="3827146" y="2854217"/>
             <a:ext cx="6660538" cy="584775"/>
           </a:xfrm>
           <a:prstGeom prst="rect">
@@ -4438,7 +4438,7 @@
         </p:nvSpPr>
         <p:spPr>
           <a:xfrm>
-            <a:off x="3827146" y="3591015"/>
+            <a:off x="3827146" y="3471151"/>
             <a:ext cx="4308230" cy="646331"/>
           </a:xfrm>
           <a:prstGeom prst="rect">
@@ -4476,7 +4476,7 @@
         </p:nvSpPr>
         <p:spPr>
           <a:xfrm>
-            <a:off x="8135376" y="3591015"/>
+            <a:off x="8135376" y="3471151"/>
             <a:ext cx="2352308" cy="369332"/>
           </a:xfrm>
           <a:prstGeom prst="rect">
@@ -4515,7 +4515,7 @@
         </p:nvSpPr>
         <p:spPr>
           <a:xfrm>
-            <a:off x="3827146" y="4182621"/>
+            <a:off x="3827146" y="4062757"/>
             <a:ext cx="6660538" cy="584775"/>
           </a:xfrm>
           <a:prstGeom prst="rect">
@@ -4559,7 +4559,7 @@
         </p:nvSpPr>
         <p:spPr>
           <a:xfrm>
-            <a:off x="3827146" y="5005926"/>
+            <a:off x="3827146" y="4886062"/>
             <a:ext cx="4308230" cy="369332"/>
           </a:xfrm>
           <a:prstGeom prst="rect">
@@ -4597,7 +4597,7 @@
         </p:nvSpPr>
         <p:spPr>
           <a:xfrm>
-            <a:off x="8135376" y="5005926"/>
+            <a:off x="8135376" y="4886062"/>
             <a:ext cx="2352308" cy="369332"/>
           </a:xfrm>
           <a:prstGeom prst="rect">
@@ -4636,7 +4636,7 @@
         </p:nvSpPr>
         <p:spPr>
           <a:xfrm>
-            <a:off x="3827146" y="5290082"/>
+            <a:off x="3827146" y="5170218"/>
             <a:ext cx="6660538" cy="338554"/>
           </a:xfrm>
           <a:prstGeom prst="rect">
@@ -4680,7 +4680,7 @@
         </p:nvSpPr>
         <p:spPr>
           <a:xfrm>
-            <a:off x="3827146" y="6221415"/>
+            <a:off x="3827146" y="5993355"/>
             <a:ext cx="6660538" cy="584775"/>
           </a:xfrm>
           <a:prstGeom prst="rect">
@@ -4722,7 +4722,7 @@
         </p:nvSpPr>
         <p:spPr>
           <a:xfrm>
-            <a:off x="3827146" y="6838349"/>
+            <a:off x="3827146" y="6610289"/>
             <a:ext cx="4308230" cy="369332"/>
           </a:xfrm>
           <a:prstGeom prst="rect">
@@ -4760,7 +4760,7 @@
         </p:nvSpPr>
         <p:spPr>
           <a:xfrm>
-            <a:off x="3827146" y="7122505"/>
+            <a:off x="3827146" y="6894445"/>
             <a:ext cx="6660538" cy="338554"/>
           </a:xfrm>
           <a:prstGeom prst="rect">
@@ -4803,7 +4803,7 @@
         </p:nvSpPr>
         <p:spPr>
           <a:xfrm>
-            <a:off x="3827146" y="7387054"/>
+            <a:off x="3827146" y="7158994"/>
             <a:ext cx="6660538" cy="1015663"/>
           </a:xfrm>
           <a:prstGeom prst="rect">
@@ -4842,7 +4842,7 @@
         </p:nvSpPr>
         <p:spPr>
           <a:xfrm>
-            <a:off x="3827146" y="8662412"/>
+            <a:off x="3827146" y="8434352"/>
             <a:ext cx="4308230" cy="369332"/>
           </a:xfrm>
           <a:prstGeom prst="rect">
@@ -4880,7 +4880,7 @@
         </p:nvSpPr>
         <p:spPr>
           <a:xfrm>
-            <a:off x="3827146" y="8939855"/>
+            <a:off x="3827146" y="8711795"/>
             <a:ext cx="6660538" cy="338554"/>
           </a:xfrm>
           <a:prstGeom prst="rect">
@@ -4923,7 +4923,7 @@
         </p:nvSpPr>
         <p:spPr>
           <a:xfrm>
-            <a:off x="3827146" y="9211117"/>
+            <a:off x="3827146" y="8983057"/>
             <a:ext cx="6660538" cy="646331"/>
           </a:xfrm>
           <a:prstGeom prst="rect">
@@ -4962,7 +4962,7 @@
         </p:nvSpPr>
         <p:spPr>
           <a:xfrm>
-            <a:off x="3827146" y="10121997"/>
+            <a:off x="3827146" y="9893937"/>
             <a:ext cx="4308230" cy="369332"/>
           </a:xfrm>
           <a:prstGeom prst="rect">
@@ -5000,7 +5000,7 @@
         </p:nvSpPr>
         <p:spPr>
           <a:xfrm>
-            <a:off x="3827146" y="10406153"/>
+            <a:off x="3827146" y="10178093"/>
             <a:ext cx="6660538" cy="338554"/>
           </a:xfrm>
           <a:prstGeom prst="rect">
@@ -5043,7 +5043,7 @@
         </p:nvSpPr>
         <p:spPr>
           <a:xfrm>
-            <a:off x="3827146" y="10670702"/>
+            <a:off x="3827146" y="10442642"/>
             <a:ext cx="6660538" cy="276999"/>
           </a:xfrm>
           <a:prstGeom prst="rect">
@@ -5082,7 +5082,7 @@
         </p:nvSpPr>
         <p:spPr>
           <a:xfrm>
-            <a:off x="3827146" y="11203935"/>
+            <a:off x="3827146" y="10975875"/>
             <a:ext cx="4308230" cy="369332"/>
           </a:xfrm>
           <a:prstGeom prst="rect">
@@ -5101,7 +5101,7 @@
                 <a:latin typeface="Poppins SemiBold" panose="00000700000000000000" pitchFamily="2" charset="0"/>
                 <a:cs typeface="Poppins SemiBold" panose="00000700000000000000" pitchFamily="2" charset="0"/>
               </a:rPr>
-              <a:t>PK_PasswordGenerator</a:t>
+              <a:t>Solvro Transport Assistant</a:t>
             </a:r>
           </a:p>
         </p:txBody>
@@ -5120,7 +5120,7 @@
         </p:nvSpPr>
         <p:spPr>
           <a:xfrm>
-            <a:off x="3827146" y="11488091"/>
+            <a:off x="3827146" y="11260031"/>
             <a:ext cx="6660538" cy="338554"/>
           </a:xfrm>
           <a:prstGeom prst="rect">
@@ -5144,7 +5144,7 @@
                 <a:latin typeface="Poppins Light" panose="00000400000000000000" pitchFamily="2" charset="0"/>
                 <a:cs typeface="Poppins Light" panose="00000400000000000000" pitchFamily="2" charset="0"/>
               </a:rPr>
-              <a:t>Python, Django, HTML, CSS, Bootstrap, JavaScript, jQuery</a:t>
+              <a:t>Python, Django, HTML, CSS, Bootstrap</a:t>
             </a:r>
           </a:p>
         </p:txBody>
@@ -5163,8 +5163,8 @@
         </p:nvSpPr>
         <p:spPr>
           <a:xfrm>
-            <a:off x="3827146" y="11752640"/>
-            <a:ext cx="6660538" cy="276999"/>
+            <a:off x="3827146" y="11524580"/>
+            <a:ext cx="6660538" cy="461665"/>
           </a:xfrm>
           <a:prstGeom prst="rect">
             <a:avLst/>
@@ -5183,7 +5183,7 @@
                 <a:latin typeface="Poppins Light" panose="00000400000000000000" pitchFamily="2" charset="0"/>
                 <a:cs typeface="Poppins Light" panose="00000400000000000000" pitchFamily="2" charset="0"/>
               </a:rPr>
-              <a:t>Basic password generator built with Django.</a:t>
+              <a:t>Application that searches for the shortest route between two stops in Solvro City. Including user authentication, user interface, API and city map visualization.</a:t>
             </a:r>
           </a:p>
         </p:txBody>

--- a/assets/ppt/PK_CV.pptx
+++ b/assets/ppt/PK_CV.pptx
@@ -243,7 +243,7 @@
           <a:p>
             <a:fld id="{FEA1A487-9522-4098-8ABE-F66374D5ED78}" type="datetimeFigureOut">
               <a:rPr lang="en-US" smtClean="0"/>
-              <a:t>2020-11-04</a:t>
+              <a:t>2020-12-19</a:t>
             </a:fld>
             <a:endParaRPr lang="en-US"/>
           </a:p>
@@ -413,7 +413,7 @@
           <a:p>
             <a:fld id="{FEA1A487-9522-4098-8ABE-F66374D5ED78}" type="datetimeFigureOut">
               <a:rPr lang="en-US" smtClean="0"/>
-              <a:t>2020-11-04</a:t>
+              <a:t>2020-12-19</a:t>
             </a:fld>
             <a:endParaRPr lang="en-US"/>
           </a:p>
@@ -593,7 +593,7 @@
           <a:p>
             <a:fld id="{FEA1A487-9522-4098-8ABE-F66374D5ED78}" type="datetimeFigureOut">
               <a:rPr lang="en-US" smtClean="0"/>
-              <a:t>2020-11-04</a:t>
+              <a:t>2020-12-19</a:t>
             </a:fld>
             <a:endParaRPr lang="en-US"/>
           </a:p>
@@ -763,7 +763,7 @@
           <a:p>
             <a:fld id="{FEA1A487-9522-4098-8ABE-F66374D5ED78}" type="datetimeFigureOut">
               <a:rPr lang="en-US" smtClean="0"/>
-              <a:t>2020-11-04</a:t>
+              <a:t>2020-12-19</a:t>
             </a:fld>
             <a:endParaRPr lang="en-US"/>
           </a:p>
@@ -1007,7 +1007,7 @@
           <a:p>
             <a:fld id="{FEA1A487-9522-4098-8ABE-F66374D5ED78}" type="datetimeFigureOut">
               <a:rPr lang="en-US" smtClean="0"/>
-              <a:t>2020-11-04</a:t>
+              <a:t>2020-12-19</a:t>
             </a:fld>
             <a:endParaRPr lang="en-US"/>
           </a:p>
@@ -1239,7 +1239,7 @@
           <a:p>
             <a:fld id="{FEA1A487-9522-4098-8ABE-F66374D5ED78}" type="datetimeFigureOut">
               <a:rPr lang="en-US" smtClean="0"/>
-              <a:t>2020-11-04</a:t>
+              <a:t>2020-12-19</a:t>
             </a:fld>
             <a:endParaRPr lang="en-US"/>
           </a:p>
@@ -1606,7 +1606,7 @@
           <a:p>
             <a:fld id="{FEA1A487-9522-4098-8ABE-F66374D5ED78}" type="datetimeFigureOut">
               <a:rPr lang="en-US" smtClean="0"/>
-              <a:t>2020-11-04</a:t>
+              <a:t>2020-12-19</a:t>
             </a:fld>
             <a:endParaRPr lang="en-US"/>
           </a:p>
@@ -1724,7 +1724,7 @@
           <a:p>
             <a:fld id="{FEA1A487-9522-4098-8ABE-F66374D5ED78}" type="datetimeFigureOut">
               <a:rPr lang="en-US" smtClean="0"/>
-              <a:t>2020-11-04</a:t>
+              <a:t>2020-12-19</a:t>
             </a:fld>
             <a:endParaRPr lang="en-US"/>
           </a:p>
@@ -1819,7 +1819,7 @@
           <a:p>
             <a:fld id="{FEA1A487-9522-4098-8ABE-F66374D5ED78}" type="datetimeFigureOut">
               <a:rPr lang="en-US" smtClean="0"/>
-              <a:t>2020-11-04</a:t>
+              <a:t>2020-12-19</a:t>
             </a:fld>
             <a:endParaRPr lang="en-US"/>
           </a:p>
@@ -2096,7 +2096,7 @@
           <a:p>
             <a:fld id="{FEA1A487-9522-4098-8ABE-F66374D5ED78}" type="datetimeFigureOut">
               <a:rPr lang="en-US" smtClean="0"/>
-              <a:t>2020-11-04</a:t>
+              <a:t>2020-12-19</a:t>
             </a:fld>
             <a:endParaRPr lang="en-US"/>
           </a:p>
@@ -2353,7 +2353,7 @@
           <a:p>
             <a:fld id="{FEA1A487-9522-4098-8ABE-F66374D5ED78}" type="datetimeFigureOut">
               <a:rPr lang="en-US" smtClean="0"/>
-              <a:t>2020-11-04</a:t>
+              <a:t>2020-12-19</a:t>
             </a:fld>
             <a:endParaRPr lang="en-US"/>
           </a:p>
@@ -2566,7 +2566,7 @@
           <a:p>
             <a:fld id="{FEA1A487-9522-4098-8ABE-F66374D5ED78}" type="datetimeFigureOut">
               <a:rPr lang="en-US" smtClean="0"/>
-              <a:t>2020-11-04</a:t>
+              <a:t>2020-12-19</a:t>
             </a:fld>
             <a:endParaRPr lang="en-US"/>
           </a:p>
@@ -2973,6 +2973,58 @@
       </p:grpSpPr>
       <p:sp>
         <p:nvSpPr>
+          <p:cNvPr id="57" name="Prostokąt 56">
+            <a:extLst>
+              <a:ext uri="{FF2B5EF4-FFF2-40B4-BE49-F238E27FC236}">
+                <a16:creationId xmlns:a16="http://schemas.microsoft.com/office/drawing/2014/main" id="{40264DB1-615F-43C0-A1DF-313061E41095}"/>
+              </a:ext>
+            </a:extLst>
+          </p:cNvPr>
+          <p:cNvSpPr/>
+          <p:nvPr/>
+        </p:nvSpPr>
+        <p:spPr>
+          <a:xfrm>
+            <a:off x="3600451" y="139849"/>
+            <a:ext cx="2283618" cy="544522"/>
+          </a:xfrm>
+          <a:prstGeom prst="rect">
+            <a:avLst/>
+          </a:prstGeom>
+          <a:solidFill>
+            <a:schemeClr val="tx1"/>
+          </a:solidFill>
+          <a:ln>
+            <a:noFill/>
+          </a:ln>
+        </p:spPr>
+        <p:style>
+          <a:lnRef idx="2">
+            <a:schemeClr val="accent1">
+              <a:shade val="50000"/>
+            </a:schemeClr>
+          </a:lnRef>
+          <a:fillRef idx="1">
+            <a:schemeClr val="accent1"/>
+          </a:fillRef>
+          <a:effectRef idx="0">
+            <a:schemeClr val="accent1"/>
+          </a:effectRef>
+          <a:fontRef idx="minor">
+            <a:schemeClr val="lt1"/>
+          </a:fontRef>
+        </p:style>
+        <p:txBody>
+          <a:bodyPr rtlCol="0" anchor="ctr"/>
+          <a:lstStyle/>
+          <a:p>
+            <a:pPr algn="ctr"/>
+            <a:endParaRPr lang="en-US"/>
+          </a:p>
+        </p:txBody>
+      </p:sp>
+      <p:sp>
+        <p:nvSpPr>
           <p:cNvPr id="8" name="Prostokąt 7">
             <a:extLst>
               <a:ext uri="{FF2B5EF4-FFF2-40B4-BE49-F238E27FC236}">
@@ -3382,7 +3434,7 @@
         <p:spPr>
           <a:xfrm>
             <a:off x="160020" y="6460326"/>
-            <a:ext cx="3280410" cy="2369880"/>
+            <a:ext cx="3280410" cy="2123658"/>
           </a:xfrm>
           <a:prstGeom prst="rect">
             <a:avLst/>
@@ -3421,7 +3473,20 @@
                 <a:latin typeface="Poppins Light" panose="00000400000000000000" pitchFamily="2" charset="0"/>
                 <a:cs typeface="Poppins Light" panose="00000400000000000000" pitchFamily="2" charset="0"/>
               </a:rPr>
-              <a:t>HTML</a:t>
+              <a:t>HTML </a:t>
+            </a:r>
+            <a:r>
+              <a:rPr lang="en-US" sz="800">
+                <a:solidFill>
+                  <a:schemeClr val="tx1">
+                    <a:lumMod val="75000"/>
+                    <a:lumOff val="25000"/>
+                  </a:schemeClr>
+                </a:solidFill>
+                <a:latin typeface="Poppins Light" panose="00000400000000000000" pitchFamily="2" charset="0"/>
+                <a:cs typeface="Poppins Light" panose="00000400000000000000" pitchFamily="2" charset="0"/>
+              </a:rPr>
+              <a:t>2015 - now</a:t>
             </a:r>
           </a:p>
           <a:p>
@@ -3439,7 +3504,20 @@
                 <a:latin typeface="Poppins Light" panose="00000400000000000000" pitchFamily="2" charset="0"/>
                 <a:cs typeface="Poppins Light" panose="00000400000000000000" pitchFamily="2" charset="0"/>
               </a:rPr>
-              <a:t>CSS</a:t>
+              <a:t>CSS, SASS </a:t>
+            </a:r>
+            <a:r>
+              <a:rPr lang="en-US" sz="800">
+                <a:solidFill>
+                  <a:schemeClr val="tx1">
+                    <a:lumMod val="75000"/>
+                    <a:lumOff val="25000"/>
+                  </a:schemeClr>
+                </a:solidFill>
+                <a:latin typeface="Poppins Light" panose="00000400000000000000" pitchFamily="2" charset="0"/>
+                <a:cs typeface="Poppins Light" panose="00000400000000000000" pitchFamily="2" charset="0"/>
+              </a:rPr>
+              <a:t>2015 - now</a:t>
             </a:r>
           </a:p>
           <a:p>
@@ -3457,7 +3535,20 @@
                 <a:latin typeface="Poppins Light" panose="00000400000000000000" pitchFamily="2" charset="0"/>
                 <a:cs typeface="Poppins Light" panose="00000400000000000000" pitchFamily="2" charset="0"/>
               </a:rPr>
-              <a:t>SASS</a:t>
+              <a:t>Bootstrap </a:t>
+            </a:r>
+            <a:r>
+              <a:rPr lang="en-US" sz="800">
+                <a:solidFill>
+                  <a:schemeClr val="tx1">
+                    <a:lumMod val="75000"/>
+                    <a:lumOff val="25000"/>
+                  </a:schemeClr>
+                </a:solidFill>
+                <a:latin typeface="Poppins Light" panose="00000400000000000000" pitchFamily="2" charset="0"/>
+                <a:cs typeface="Poppins Light" panose="00000400000000000000" pitchFamily="2" charset="0"/>
+              </a:rPr>
+              <a:t>2018 - now</a:t>
             </a:r>
           </a:p>
           <a:p>
@@ -3475,7 +3566,20 @@
                 <a:latin typeface="Poppins Light" panose="00000400000000000000" pitchFamily="2" charset="0"/>
                 <a:cs typeface="Poppins Light" panose="00000400000000000000" pitchFamily="2" charset="0"/>
               </a:rPr>
-              <a:t>Bootstrap</a:t>
+              <a:t>JavaScript </a:t>
+            </a:r>
+            <a:r>
+              <a:rPr lang="en-US" sz="800">
+                <a:solidFill>
+                  <a:schemeClr val="tx1">
+                    <a:lumMod val="75000"/>
+                    <a:lumOff val="25000"/>
+                  </a:schemeClr>
+                </a:solidFill>
+                <a:latin typeface="Poppins Light" panose="00000400000000000000" pitchFamily="2" charset="0"/>
+                <a:cs typeface="Poppins Light" panose="00000400000000000000" pitchFamily="2" charset="0"/>
+              </a:rPr>
+              <a:t>2015 - now</a:t>
             </a:r>
           </a:p>
           <a:p>
@@ -3493,7 +3597,20 @@
                 <a:latin typeface="Poppins Light" panose="00000400000000000000" pitchFamily="2" charset="0"/>
                 <a:cs typeface="Poppins Light" panose="00000400000000000000" pitchFamily="2" charset="0"/>
               </a:rPr>
-              <a:t>JavaScript</a:t>
+              <a:t>jQuery </a:t>
+            </a:r>
+            <a:r>
+              <a:rPr lang="en-US" sz="800">
+                <a:solidFill>
+                  <a:schemeClr val="tx1">
+                    <a:lumMod val="75000"/>
+                    <a:lumOff val="25000"/>
+                  </a:schemeClr>
+                </a:solidFill>
+                <a:latin typeface="Poppins Light" panose="00000400000000000000" pitchFamily="2" charset="0"/>
+                <a:cs typeface="Poppins Light" panose="00000400000000000000" pitchFamily="2" charset="0"/>
+              </a:rPr>
+              <a:t>2016 - now</a:t>
             </a:r>
           </a:p>
           <a:p>
@@ -3511,7 +3628,20 @@
                 <a:latin typeface="Poppins Light" panose="00000400000000000000" pitchFamily="2" charset="0"/>
                 <a:cs typeface="Poppins Light" panose="00000400000000000000" pitchFamily="2" charset="0"/>
               </a:rPr>
-              <a:t>jQuery</a:t>
+              <a:t>AJAX </a:t>
+            </a:r>
+            <a:r>
+              <a:rPr lang="en-US" sz="800">
+                <a:solidFill>
+                  <a:schemeClr val="tx1">
+                    <a:lumMod val="75000"/>
+                    <a:lumOff val="25000"/>
+                  </a:schemeClr>
+                </a:solidFill>
+                <a:latin typeface="Poppins Light" panose="00000400000000000000" pitchFamily="2" charset="0"/>
+                <a:cs typeface="Poppins Light" panose="00000400000000000000" pitchFamily="2" charset="0"/>
+              </a:rPr>
+              <a:t>2016 - now</a:t>
             </a:r>
           </a:p>
           <a:p>
@@ -3529,25 +3659,33 @@
                 <a:latin typeface="Poppins Light" panose="00000400000000000000" pitchFamily="2" charset="0"/>
                 <a:cs typeface="Poppins Light" panose="00000400000000000000" pitchFamily="2" charset="0"/>
               </a:rPr>
-              <a:t>AJAX</a:t>
-            </a:r>
-          </a:p>
-          <a:p>
-            <a:pPr marL="285750" indent="-285750">
-              <a:buFont typeface="Wingdings" panose="05000000000000000000" pitchFamily="2" charset="2"/>
-              <a:buChar char="§"/>
-            </a:pPr>
+              <a:t>UI &amp; UX</a:t>
+            </a:r>
             <a:r>
               <a:rPr lang="en-US" sz="1600">
                 <a:solidFill>
-                  <a:schemeClr val="bg1">
-                    <a:lumMod val="85000"/>
+                  <a:schemeClr val="tx1">
+                    <a:lumMod val="50000"/>
+                    <a:lumOff val="50000"/>
                   </a:schemeClr>
                 </a:solidFill>
                 <a:latin typeface="Poppins Light" panose="00000400000000000000" pitchFamily="2" charset="0"/>
                 <a:cs typeface="Poppins Light" panose="00000400000000000000" pitchFamily="2" charset="0"/>
               </a:rPr>
-              <a:t>UI &amp; UX</a:t>
+              <a:t> </a:t>
+            </a:r>
+            <a:r>
+              <a:rPr lang="en-US" sz="800">
+                <a:solidFill>
+                  <a:schemeClr val="tx1">
+                    <a:lumMod val="75000"/>
+                    <a:lumOff val="25000"/>
+                  </a:schemeClr>
+                </a:solidFill>
+                <a:latin typeface="Poppins Light" panose="00000400000000000000" pitchFamily="2" charset="0"/>
+                <a:cs typeface="Poppins Light" panose="00000400000000000000" pitchFamily="2" charset="0"/>
+              </a:rPr>
+              <a:t>2015 - now</a:t>
             </a:r>
           </a:p>
         </p:txBody>
@@ -3566,7 +3704,7 @@
         </p:nvSpPr>
         <p:spPr>
           <a:xfrm>
-            <a:off x="160020" y="9109132"/>
+            <a:off x="160020" y="8811081"/>
             <a:ext cx="3280410" cy="1631216"/>
           </a:xfrm>
           <a:prstGeom prst="rect">
@@ -3606,7 +3744,20 @@
                 <a:latin typeface="Poppins Light" panose="00000400000000000000" pitchFamily="2" charset="0"/>
                 <a:cs typeface="Poppins Light" panose="00000400000000000000" pitchFamily="2" charset="0"/>
               </a:rPr>
-              <a:t>Python</a:t>
+              <a:t>Python </a:t>
+            </a:r>
+            <a:r>
+              <a:rPr lang="en-US" sz="800">
+                <a:solidFill>
+                  <a:schemeClr val="tx1">
+                    <a:lumMod val="75000"/>
+                    <a:lumOff val="25000"/>
+                  </a:schemeClr>
+                </a:solidFill>
+                <a:latin typeface="Poppins Light" panose="00000400000000000000" pitchFamily="2" charset="0"/>
+                <a:cs typeface="Poppins Light" panose="00000400000000000000" pitchFamily="2" charset="0"/>
+              </a:rPr>
+              <a:t>2016 - now</a:t>
             </a:r>
           </a:p>
           <a:p>
@@ -3624,7 +3775,20 @@
                 <a:latin typeface="Poppins Light" panose="00000400000000000000" pitchFamily="2" charset="0"/>
                 <a:cs typeface="Poppins Light" panose="00000400000000000000" pitchFamily="2" charset="0"/>
               </a:rPr>
-              <a:t>Django</a:t>
+              <a:t>Django </a:t>
+            </a:r>
+            <a:r>
+              <a:rPr lang="en-US" sz="800">
+                <a:solidFill>
+                  <a:schemeClr val="tx1">
+                    <a:lumMod val="75000"/>
+                    <a:lumOff val="25000"/>
+                  </a:schemeClr>
+                </a:solidFill>
+                <a:latin typeface="Poppins Light" panose="00000400000000000000" pitchFamily="2" charset="0"/>
+                <a:cs typeface="Poppins Light" panose="00000400000000000000" pitchFamily="2" charset="0"/>
+              </a:rPr>
+              <a:t>2018 - now</a:t>
             </a:r>
           </a:p>
           <a:p>
@@ -3642,7 +3806,20 @@
                 <a:latin typeface="Poppins Light" panose="00000400000000000000" pitchFamily="2" charset="0"/>
                 <a:cs typeface="Poppins Light" panose="00000400000000000000" pitchFamily="2" charset="0"/>
               </a:rPr>
-              <a:t>PHP</a:t>
+              <a:t>HTTP, TCP, IP </a:t>
+            </a:r>
+            <a:r>
+              <a:rPr lang="en-US" sz="800">
+                <a:solidFill>
+                  <a:schemeClr val="tx1">
+                    <a:lumMod val="75000"/>
+                    <a:lumOff val="25000"/>
+                  </a:schemeClr>
+                </a:solidFill>
+                <a:latin typeface="Poppins Light" panose="00000400000000000000" pitchFamily="2" charset="0"/>
+                <a:cs typeface="Poppins Light" panose="00000400000000000000" pitchFamily="2" charset="0"/>
+              </a:rPr>
+              <a:t>2015 - now</a:t>
             </a:r>
           </a:p>
           <a:p>
@@ -3660,7 +3837,20 @@
                 <a:latin typeface="Poppins Light" panose="00000400000000000000" pitchFamily="2" charset="0"/>
                 <a:cs typeface="Poppins Light" panose="00000400000000000000" pitchFamily="2" charset="0"/>
               </a:rPr>
-              <a:t>SQL</a:t>
+              <a:t>SQL </a:t>
+            </a:r>
+            <a:r>
+              <a:rPr lang="en-US" sz="800">
+                <a:solidFill>
+                  <a:schemeClr val="tx1">
+                    <a:lumMod val="75000"/>
+                    <a:lumOff val="25000"/>
+                  </a:schemeClr>
+                </a:solidFill>
+                <a:latin typeface="Poppins Light" panose="00000400000000000000" pitchFamily="2" charset="0"/>
+                <a:cs typeface="Poppins Light" panose="00000400000000000000" pitchFamily="2" charset="0"/>
+              </a:rPr>
+              <a:t>2015 - now</a:t>
             </a:r>
           </a:p>
           <a:p>
@@ -3678,7 +3868,20 @@
                 <a:latin typeface="Poppins Light" panose="00000400000000000000" pitchFamily="2" charset="0"/>
                 <a:cs typeface="Poppins Light" panose="00000400000000000000" pitchFamily="2" charset="0"/>
               </a:rPr>
-              <a:t>REST API</a:t>
+              <a:t>REST API </a:t>
+            </a:r>
+            <a:r>
+              <a:rPr lang="en-US" sz="800">
+                <a:solidFill>
+                  <a:schemeClr val="tx1">
+                    <a:lumMod val="75000"/>
+                    <a:lumOff val="25000"/>
+                  </a:schemeClr>
+                </a:solidFill>
+                <a:latin typeface="Poppins Light" panose="00000400000000000000" pitchFamily="2" charset="0"/>
+                <a:cs typeface="Poppins Light" panose="00000400000000000000" pitchFamily="2" charset="0"/>
+              </a:rPr>
+              <a:t>2018 - now</a:t>
             </a:r>
           </a:p>
         </p:txBody>
@@ -3697,8 +3900,8 @@
         </p:nvSpPr>
         <p:spPr>
           <a:xfrm>
-            <a:off x="3815862" y="13916844"/>
-            <a:ext cx="6660538" cy="1061829"/>
+            <a:off x="3815862" y="14652458"/>
+            <a:ext cx="6660538" cy="323165"/>
           </a:xfrm>
           <a:prstGeom prst="rect">
             <a:avLst/>
@@ -3713,10 +3916,10 @@
           <a:p>
             <a:pPr algn="just"/>
             <a:r>
-              <a:rPr lang="en-US" sz="1050">
+              <a:rPr lang="en-US" sz="500">
                 <a:solidFill>
                   <a:schemeClr val="bg1">
-                    <a:lumMod val="50000"/>
+                    <a:lumMod val="75000"/>
                   </a:schemeClr>
                 </a:solidFill>
                 <a:latin typeface="Poppins Light" panose="00000400000000000000" pitchFamily="2" charset="0"/>
@@ -3741,7 +3944,7 @@
         </p:nvSpPr>
         <p:spPr>
           <a:xfrm>
-            <a:off x="160020" y="12845897"/>
+            <a:off x="160020" y="13047707"/>
             <a:ext cx="3280410" cy="646331"/>
           </a:xfrm>
           <a:prstGeom prst="rect">
@@ -3781,8 +3984,43 @@
                 <a:latin typeface="Poppins Light" panose="00000400000000000000" pitchFamily="2" charset="0"/>
                 <a:cs typeface="Poppins Light" panose="00000400000000000000" pitchFamily="2" charset="0"/>
               </a:rPr>
-              <a:t>English at B2 level</a:t>
-            </a:r>
+              <a:t>English</a:t>
+            </a:r>
+            <a:r>
+              <a:rPr lang="en-US" sz="1600">
+                <a:solidFill>
+                  <a:schemeClr val="tx1">
+                    <a:lumMod val="75000"/>
+                    <a:lumOff val="25000"/>
+                  </a:schemeClr>
+                </a:solidFill>
+                <a:latin typeface="Poppins Light" panose="00000400000000000000" pitchFamily="2" charset="0"/>
+                <a:cs typeface="Poppins Light" panose="00000400000000000000" pitchFamily="2" charset="0"/>
+              </a:rPr>
+              <a:t> </a:t>
+            </a:r>
+            <a:r>
+              <a:rPr lang="en-US" sz="800">
+                <a:solidFill>
+                  <a:schemeClr val="tx1">
+                    <a:lumMod val="75000"/>
+                    <a:lumOff val="25000"/>
+                  </a:schemeClr>
+                </a:solidFill>
+                <a:latin typeface="Poppins Light" panose="00000400000000000000" pitchFamily="2" charset="0"/>
+                <a:cs typeface="Poppins Light" panose="00000400000000000000" pitchFamily="2" charset="0"/>
+              </a:rPr>
+              <a:t>B2</a:t>
+            </a:r>
+            <a:endParaRPr lang="en-US" sz="800">
+              <a:solidFill>
+                <a:schemeClr val="bg1">
+                  <a:lumMod val="85000"/>
+                </a:schemeClr>
+              </a:solidFill>
+              <a:latin typeface="Poppins Light" panose="00000400000000000000" pitchFamily="2" charset="0"/>
+              <a:cs typeface="Poppins Light" panose="00000400000000000000" pitchFamily="2" charset="0"/>
+            </a:endParaRPr>
           </a:p>
         </p:txBody>
       </p:sp>
@@ -3800,8 +4038,8 @@
         </p:nvSpPr>
         <p:spPr>
           <a:xfrm>
-            <a:off x="160020" y="11019274"/>
-            <a:ext cx="3280410" cy="1631216"/>
+            <a:off x="160020" y="10643598"/>
+            <a:ext cx="3280410" cy="2123658"/>
           </a:xfrm>
           <a:prstGeom prst="rect">
             <a:avLst/>
@@ -3840,7 +4078,33 @@
                 <a:latin typeface="Poppins Light" panose="00000400000000000000" pitchFamily="2" charset="0"/>
                 <a:cs typeface="Poppins Light" panose="00000400000000000000" pitchFamily="2" charset="0"/>
               </a:rPr>
-              <a:t>Git</a:t>
+              <a:t>Linux </a:t>
+            </a:r>
+            <a:r>
+              <a:rPr lang="en-US" sz="800">
+                <a:solidFill>
+                  <a:schemeClr val="tx1">
+                    <a:lumMod val="75000"/>
+                    <a:lumOff val="25000"/>
+                  </a:schemeClr>
+                </a:solidFill>
+                <a:latin typeface="Poppins Light" panose="00000400000000000000" pitchFamily="2" charset="0"/>
+                <a:cs typeface="Poppins Light" panose="00000400000000000000" pitchFamily="2" charset="0"/>
+              </a:rPr>
+              <a:t>basics</a:t>
+            </a:r>
+            <a:r>
+              <a:rPr lang="en-US" sz="1600">
+                <a:solidFill>
+                  <a:schemeClr val="tx1">
+                    <a:lumMod val="75000"/>
+                    <a:lumOff val="25000"/>
+                  </a:schemeClr>
+                </a:solidFill>
+                <a:latin typeface="Poppins Light" panose="00000400000000000000" pitchFamily="2" charset="0"/>
+                <a:cs typeface="Poppins Light" panose="00000400000000000000" pitchFamily="2" charset="0"/>
+              </a:rPr>
+              <a:t> </a:t>
             </a:r>
           </a:p>
           <a:p>
@@ -3858,7 +4122,20 @@
                 <a:latin typeface="Poppins Light" panose="00000400000000000000" pitchFamily="2" charset="0"/>
                 <a:cs typeface="Poppins Light" panose="00000400000000000000" pitchFamily="2" charset="0"/>
               </a:rPr>
-              <a:t>Photoshop</a:t>
+              <a:t>Git </a:t>
+            </a:r>
+            <a:r>
+              <a:rPr lang="en-US" sz="800">
+                <a:solidFill>
+                  <a:schemeClr val="tx1">
+                    <a:lumMod val="75000"/>
+                    <a:lumOff val="25000"/>
+                  </a:schemeClr>
+                </a:solidFill>
+                <a:latin typeface="Poppins Light" panose="00000400000000000000" pitchFamily="2" charset="0"/>
+                <a:cs typeface="Poppins Light" panose="00000400000000000000" pitchFamily="2" charset="0"/>
+              </a:rPr>
+              <a:t>2015 - now</a:t>
             </a:r>
           </a:p>
           <a:p>
@@ -3876,7 +4153,20 @@
                 <a:latin typeface="Poppins Light" panose="00000400000000000000" pitchFamily="2" charset="0"/>
                 <a:cs typeface="Poppins Light" panose="00000400000000000000" pitchFamily="2" charset="0"/>
               </a:rPr>
-              <a:t>Premiere Pro</a:t>
+              <a:t>Photoshop </a:t>
+            </a:r>
+            <a:r>
+              <a:rPr lang="en-US" sz="800">
+                <a:solidFill>
+                  <a:schemeClr val="tx1">
+                    <a:lumMod val="75000"/>
+                    <a:lumOff val="25000"/>
+                  </a:schemeClr>
+                </a:solidFill>
+                <a:latin typeface="Poppins Light" panose="00000400000000000000" pitchFamily="2" charset="0"/>
+                <a:cs typeface="Poppins Light" panose="00000400000000000000" pitchFamily="2" charset="0"/>
+              </a:rPr>
+              <a:t>2014 - now</a:t>
             </a:r>
           </a:p>
           <a:p>
@@ -3894,8 +4184,18 @@
                 <a:latin typeface="Poppins Light" panose="00000400000000000000" pitchFamily="2" charset="0"/>
                 <a:cs typeface="Poppins Light" panose="00000400000000000000" pitchFamily="2" charset="0"/>
               </a:rPr>
-              <a:t>Java</a:t>
-            </a:r>
+              <a:t>TinkerCAD</a:t>
+            </a:r>
+            <a:endParaRPr lang="en-US" sz="800">
+              <a:solidFill>
+                <a:schemeClr val="tx1">
+                  <a:lumMod val="75000"/>
+                  <a:lumOff val="25000"/>
+                </a:schemeClr>
+              </a:solidFill>
+              <a:latin typeface="Poppins Light" panose="00000400000000000000" pitchFamily="2" charset="0"/>
+              <a:cs typeface="Poppins Light" panose="00000400000000000000" pitchFamily="2" charset="0"/>
+            </a:endParaRPr>
           </a:p>
           <a:p>
             <a:pPr marL="285750" indent="-285750">
@@ -3912,8 +4212,80 @@
                 <a:latin typeface="Poppins Light" panose="00000400000000000000" pitchFamily="2" charset="0"/>
                 <a:cs typeface="Poppins Light" panose="00000400000000000000" pitchFamily="2" charset="0"/>
               </a:rPr>
-              <a:t>C++</a:t>
-            </a:r>
+              <a:t>Java </a:t>
+            </a:r>
+            <a:r>
+              <a:rPr lang="en-US" sz="800">
+                <a:solidFill>
+                  <a:schemeClr val="tx1">
+                    <a:lumMod val="75000"/>
+                    <a:lumOff val="25000"/>
+                  </a:schemeClr>
+                </a:solidFill>
+                <a:latin typeface="Poppins Light" panose="00000400000000000000" pitchFamily="2" charset="0"/>
+                <a:cs typeface="Poppins Light" panose="00000400000000000000" pitchFamily="2" charset="0"/>
+              </a:rPr>
+              <a:t>basics</a:t>
+            </a:r>
+          </a:p>
+          <a:p>
+            <a:pPr marL="285750" indent="-285750">
+              <a:buFont typeface="Wingdings" panose="05000000000000000000" pitchFamily="2" charset="2"/>
+              <a:buChar char="§"/>
+            </a:pPr>
+            <a:r>
+              <a:rPr lang="en-US" sz="1600">
+                <a:solidFill>
+                  <a:schemeClr val="bg1">
+                    <a:lumMod val="85000"/>
+                  </a:schemeClr>
+                </a:solidFill>
+                <a:latin typeface="Poppins Light" panose="00000400000000000000" pitchFamily="2" charset="0"/>
+                <a:cs typeface="Poppins Light" panose="00000400000000000000" pitchFamily="2" charset="0"/>
+              </a:rPr>
+              <a:t>C++ </a:t>
+            </a:r>
+            <a:r>
+              <a:rPr lang="en-US" sz="800">
+                <a:solidFill>
+                  <a:schemeClr val="tx1">
+                    <a:lumMod val="75000"/>
+                    <a:lumOff val="25000"/>
+                  </a:schemeClr>
+                </a:solidFill>
+                <a:latin typeface="Poppins Light" panose="00000400000000000000" pitchFamily="2" charset="0"/>
+                <a:cs typeface="Poppins Light" panose="00000400000000000000" pitchFamily="2" charset="0"/>
+              </a:rPr>
+              <a:t>basics</a:t>
+            </a:r>
+          </a:p>
+          <a:p>
+            <a:pPr marL="285750" indent="-285750">
+              <a:buFont typeface="Wingdings" panose="05000000000000000000" pitchFamily="2" charset="2"/>
+              <a:buChar char="§"/>
+            </a:pPr>
+            <a:r>
+              <a:rPr lang="en-US" sz="1600">
+                <a:solidFill>
+                  <a:schemeClr val="bg1">
+                    <a:lumMod val="85000"/>
+                  </a:schemeClr>
+                </a:solidFill>
+                <a:latin typeface="Poppins Light" panose="00000400000000000000" pitchFamily="2" charset="0"/>
+                <a:cs typeface="Poppins Light" panose="00000400000000000000" pitchFamily="2" charset="0"/>
+              </a:rPr>
+              <a:t>WordPress</a:t>
+            </a:r>
+            <a:endParaRPr lang="en-US" sz="800">
+              <a:solidFill>
+                <a:schemeClr val="tx1">
+                  <a:lumMod val="75000"/>
+                  <a:lumOff val="25000"/>
+                </a:schemeClr>
+              </a:solidFill>
+              <a:latin typeface="Poppins Light" panose="00000400000000000000" pitchFamily="2" charset="0"/>
+              <a:cs typeface="Poppins Light" panose="00000400000000000000" pitchFamily="2" charset="0"/>
+            </a:endParaRPr>
           </a:p>
         </p:txBody>
       </p:sp>
@@ -4112,8 +4484,8 @@
         </p:nvSpPr>
         <p:spPr>
           <a:xfrm>
-            <a:off x="3815862" y="476820"/>
-            <a:ext cx="6660538" cy="584775"/>
+            <a:off x="3815862" y="188273"/>
+            <a:ext cx="6660538" cy="461665"/>
           </a:xfrm>
           <a:prstGeom prst="rect">
             <a:avLst/>
@@ -4127,13 +4499,23 @@
           <a:lstStyle/>
           <a:p>
             <a:r>
-              <a:rPr lang="en-US" sz="3200">
+              <a:rPr lang="en-US" sz="2400">
+                <a:solidFill>
+                  <a:schemeClr val="bg1">
+                    <a:lumMod val="95000"/>
+                  </a:schemeClr>
+                </a:solidFill>
                 <a:latin typeface="Poppins Light" panose="00000400000000000000" pitchFamily="2" charset="0"/>
                 <a:cs typeface="Poppins Light" panose="00000400000000000000" pitchFamily="2" charset="0"/>
               </a:rPr>
-              <a:t>Experience</a:t>
-            </a:r>
-            <a:endParaRPr lang="en-US" sz="2400">
+              <a:t>EXPERIENCE</a:t>
+            </a:r>
+            <a:endParaRPr lang="en-US">
+              <a:solidFill>
+                <a:schemeClr val="bg1">
+                  <a:lumMod val="95000"/>
+                </a:schemeClr>
+              </a:solidFill>
               <a:latin typeface="Poppins Light" panose="00000400000000000000" pitchFamily="2" charset="0"/>
               <a:cs typeface="Poppins Light" panose="00000400000000000000" pitchFamily="2" charset="0"/>
             </a:endParaRPr>
@@ -4154,7 +4536,7 @@
         </p:nvSpPr>
         <p:spPr>
           <a:xfrm>
-            <a:off x="3815862" y="1093754"/>
+            <a:off x="3815862" y="933565"/>
             <a:ext cx="4308230" cy="369332"/>
           </a:xfrm>
           <a:prstGeom prst="rect">
@@ -4192,7 +4574,7 @@
         </p:nvSpPr>
         <p:spPr>
           <a:xfrm>
-            <a:off x="8124092" y="1093754"/>
+            <a:off x="8124092" y="933565"/>
             <a:ext cx="2352308" cy="369332"/>
           </a:xfrm>
           <a:prstGeom prst="rect">
@@ -4231,7 +4613,7 @@
         </p:nvSpPr>
         <p:spPr>
           <a:xfrm>
-            <a:off x="3815862" y="1377910"/>
+            <a:off x="3815862" y="1242155"/>
             <a:ext cx="6660538" cy="338554"/>
           </a:xfrm>
           <a:prstGeom prst="rect">
@@ -4275,7 +4657,7 @@
         </p:nvSpPr>
         <p:spPr>
           <a:xfrm>
-            <a:off x="3815862" y="1950170"/>
+            <a:off x="3815862" y="2160313"/>
             <a:ext cx="4308230" cy="369332"/>
           </a:xfrm>
           <a:prstGeom prst="rect">
@@ -4313,7 +4695,7 @@
         </p:nvSpPr>
         <p:spPr>
           <a:xfrm>
-            <a:off x="8124092" y="1950170"/>
+            <a:off x="8124092" y="2160313"/>
             <a:ext cx="2352308" cy="369332"/>
           </a:xfrm>
           <a:prstGeom prst="rect">
@@ -4352,7 +4734,7 @@
         </p:nvSpPr>
         <p:spPr>
           <a:xfrm>
-            <a:off x="3815862" y="2234326"/>
+            <a:off x="3815862" y="2444469"/>
             <a:ext cx="6660538" cy="338554"/>
           </a:xfrm>
           <a:prstGeom prst="rect">
@@ -4379,48 +4761,6 @@
               </a:rPr>
               <a:t>Scorpion Dance Team (Contract)</a:t>
             </a:r>
-          </a:p>
-        </p:txBody>
-      </p:sp>
-      <p:sp>
-        <p:nvSpPr>
-          <p:cNvPr id="42" name="pole tekstowe 41">
-            <a:extLst>
-              <a:ext uri="{FF2B5EF4-FFF2-40B4-BE49-F238E27FC236}">
-                <a16:creationId xmlns:a16="http://schemas.microsoft.com/office/drawing/2014/main" id="{408DE1C4-FBEE-4CEE-B385-2CF845B6B7D8}"/>
-              </a:ext>
-            </a:extLst>
-          </p:cNvPr>
-          <p:cNvSpPr txBox="1"/>
-          <p:nvPr/>
-        </p:nvSpPr>
-        <p:spPr>
-          <a:xfrm>
-            <a:off x="3827146" y="2854217"/>
-            <a:ext cx="6660538" cy="584775"/>
-          </a:xfrm>
-          <a:prstGeom prst="rect">
-            <a:avLst/>
-          </a:prstGeom>
-          <a:noFill/>
-        </p:spPr>
-        <p:txBody>
-          <a:bodyPr wrap="square" rtlCol="0">
-            <a:spAutoFit/>
-          </a:bodyPr>
-          <a:lstStyle/>
-          <a:p>
-            <a:r>
-              <a:rPr lang="en-US" sz="3200">
-                <a:latin typeface="Poppins Light" panose="00000400000000000000" pitchFamily="2" charset="0"/>
-                <a:cs typeface="Poppins Light" panose="00000400000000000000" pitchFamily="2" charset="0"/>
-              </a:rPr>
-              <a:t>Education</a:t>
-            </a:r>
-            <a:endParaRPr lang="en-US" sz="2400">
-              <a:latin typeface="Poppins Light" panose="00000400000000000000" pitchFamily="2" charset="0"/>
-              <a:cs typeface="Poppins Light" panose="00000400000000000000" pitchFamily="2" charset="0"/>
-            </a:endParaRPr>
           </a:p>
         </p:txBody>
       </p:sp>
@@ -4438,7 +4778,7 @@
         </p:nvSpPr>
         <p:spPr>
           <a:xfrm>
-            <a:off x="3827146" y="3471151"/>
+            <a:off x="3827146" y="4407521"/>
             <a:ext cx="4308230" cy="646331"/>
           </a:xfrm>
           <a:prstGeom prst="rect">
@@ -4476,7 +4816,7 @@
         </p:nvSpPr>
         <p:spPr>
           <a:xfrm>
-            <a:off x="8135376" y="3471151"/>
+            <a:off x="8135376" y="4407521"/>
             <a:ext cx="2352308" cy="369332"/>
           </a:xfrm>
           <a:prstGeom prst="rect">
@@ -4515,7 +4855,7 @@
         </p:nvSpPr>
         <p:spPr>
           <a:xfrm>
-            <a:off x="3827146" y="4062757"/>
+            <a:off x="3827146" y="4999127"/>
             <a:ext cx="6660538" cy="584775"/>
           </a:xfrm>
           <a:prstGeom prst="rect">
@@ -4559,7 +4899,7 @@
         </p:nvSpPr>
         <p:spPr>
           <a:xfrm>
-            <a:off x="3827146" y="4886062"/>
+            <a:off x="3827146" y="5822432"/>
             <a:ext cx="4308230" cy="369332"/>
           </a:xfrm>
           <a:prstGeom prst="rect">
@@ -4597,7 +4937,7 @@
         </p:nvSpPr>
         <p:spPr>
           <a:xfrm>
-            <a:off x="8135376" y="4886062"/>
+            <a:off x="8135376" y="5822432"/>
             <a:ext cx="2352308" cy="369332"/>
           </a:xfrm>
           <a:prstGeom prst="rect">
@@ -4636,7 +4976,7 @@
         </p:nvSpPr>
         <p:spPr>
           <a:xfrm>
-            <a:off x="3827146" y="5170218"/>
+            <a:off x="3827146" y="6106588"/>
             <a:ext cx="6660538" cy="338554"/>
           </a:xfrm>
           <a:prstGeom prst="rect">
@@ -4663,48 +5003,6 @@
               </a:rPr>
               <a:t>IT Specialist</a:t>
             </a:r>
-          </a:p>
-        </p:txBody>
-      </p:sp>
-      <p:sp>
-        <p:nvSpPr>
-          <p:cNvPr id="52" name="pole tekstowe 51">
-            <a:extLst>
-              <a:ext uri="{FF2B5EF4-FFF2-40B4-BE49-F238E27FC236}">
-                <a16:creationId xmlns:a16="http://schemas.microsoft.com/office/drawing/2014/main" id="{F7C5404A-A77D-43BB-86CE-AEF4C1B0A66D}"/>
-              </a:ext>
-            </a:extLst>
-          </p:cNvPr>
-          <p:cNvSpPr txBox="1"/>
-          <p:nvPr/>
-        </p:nvSpPr>
-        <p:spPr>
-          <a:xfrm>
-            <a:off x="3827146" y="5993355"/>
-            <a:ext cx="6660538" cy="584775"/>
-          </a:xfrm>
-          <a:prstGeom prst="rect">
-            <a:avLst/>
-          </a:prstGeom>
-          <a:noFill/>
-        </p:spPr>
-        <p:txBody>
-          <a:bodyPr wrap="square" rtlCol="0">
-            <a:spAutoFit/>
-          </a:bodyPr>
-          <a:lstStyle/>
-          <a:p>
-            <a:r>
-              <a:rPr lang="en-US" sz="3200">
-                <a:latin typeface="Poppins Light" panose="00000400000000000000" pitchFamily="2" charset="0"/>
-                <a:cs typeface="Poppins Light" panose="00000400000000000000" pitchFamily="2" charset="0"/>
-              </a:rPr>
-              <a:t>Projects</a:t>
-            </a:r>
-            <a:endParaRPr lang="en-US" sz="2400">
-              <a:latin typeface="Poppins Light" panose="00000400000000000000" pitchFamily="2" charset="0"/>
-              <a:cs typeface="Poppins Light" panose="00000400000000000000" pitchFamily="2" charset="0"/>
-            </a:endParaRPr>
           </a:p>
         </p:txBody>
       </p:sp>
@@ -4722,7 +5020,7 @@
         </p:nvSpPr>
         <p:spPr>
           <a:xfrm>
-            <a:off x="3827146" y="6610289"/>
+            <a:off x="3827146" y="7656042"/>
             <a:ext cx="4308230" cy="369332"/>
           </a:xfrm>
           <a:prstGeom prst="rect">
@@ -4760,7 +5058,7 @@
         </p:nvSpPr>
         <p:spPr>
           <a:xfrm>
-            <a:off x="3827146" y="6894445"/>
+            <a:off x="3827146" y="7940198"/>
             <a:ext cx="6660538" cy="338554"/>
           </a:xfrm>
           <a:prstGeom prst="rect">
@@ -4803,7 +5101,7 @@
         </p:nvSpPr>
         <p:spPr>
           <a:xfrm>
-            <a:off x="3827146" y="7158994"/>
+            <a:off x="3827146" y="8204747"/>
             <a:ext cx="6660538" cy="1015663"/>
           </a:xfrm>
           <a:prstGeom prst="rect">
@@ -4842,7 +5140,7 @@
         </p:nvSpPr>
         <p:spPr>
           <a:xfrm>
-            <a:off x="3827146" y="8434352"/>
+            <a:off x="3827146" y="9480105"/>
             <a:ext cx="4308230" cy="369332"/>
           </a:xfrm>
           <a:prstGeom prst="rect">
@@ -4880,7 +5178,7 @@
         </p:nvSpPr>
         <p:spPr>
           <a:xfrm>
-            <a:off x="3827146" y="8711795"/>
+            <a:off x="3827146" y="9757548"/>
             <a:ext cx="6660538" cy="338554"/>
           </a:xfrm>
           <a:prstGeom prst="rect">
@@ -4923,7 +5221,7 @@
         </p:nvSpPr>
         <p:spPr>
           <a:xfrm>
-            <a:off x="3827146" y="8983057"/>
+            <a:off x="3827146" y="10028810"/>
             <a:ext cx="6660538" cy="646331"/>
           </a:xfrm>
           <a:prstGeom prst="rect">
@@ -4962,7 +5260,7 @@
         </p:nvSpPr>
         <p:spPr>
           <a:xfrm>
-            <a:off x="3827146" y="9893937"/>
+            <a:off x="3827146" y="10939690"/>
             <a:ext cx="4308230" cy="369332"/>
           </a:xfrm>
           <a:prstGeom prst="rect">
@@ -5000,7 +5298,7 @@
         </p:nvSpPr>
         <p:spPr>
           <a:xfrm>
-            <a:off x="3827146" y="10178093"/>
+            <a:off x="3827146" y="11223846"/>
             <a:ext cx="6660538" cy="338554"/>
           </a:xfrm>
           <a:prstGeom prst="rect">
@@ -5043,7 +5341,7 @@
         </p:nvSpPr>
         <p:spPr>
           <a:xfrm>
-            <a:off x="3827146" y="10442642"/>
+            <a:off x="3827146" y="11488395"/>
             <a:ext cx="6660538" cy="276999"/>
           </a:xfrm>
           <a:prstGeom prst="rect">
@@ -5063,7 +5361,7 @@
                 <a:latin typeface="Poppins Light" panose="00000400000000000000" pitchFamily="2" charset="0"/>
                 <a:cs typeface="Poppins Light" panose="00000400000000000000" pitchFamily="2" charset="0"/>
               </a:rPr>
-              <a:t>Scorpion Dance Team website created and administered by me since 2015.</a:t>
+              <a:t>Scorpion Dance Team website.</a:t>
             </a:r>
           </a:p>
         </p:txBody>
@@ -5082,7 +5380,7 @@
         </p:nvSpPr>
         <p:spPr>
           <a:xfrm>
-            <a:off x="3827146" y="10975875"/>
+            <a:off x="3827146" y="12021628"/>
             <a:ext cx="4308230" cy="369332"/>
           </a:xfrm>
           <a:prstGeom prst="rect">
@@ -5120,7 +5418,7 @@
         </p:nvSpPr>
         <p:spPr>
           <a:xfrm>
-            <a:off x="3827146" y="11260031"/>
+            <a:off x="3827146" y="12305784"/>
             <a:ext cx="6660538" cy="338554"/>
           </a:xfrm>
           <a:prstGeom prst="rect">
@@ -5163,7 +5461,7 @@
         </p:nvSpPr>
         <p:spPr>
           <a:xfrm>
-            <a:off x="3827146" y="11524580"/>
+            <a:off x="3827146" y="12570333"/>
             <a:ext cx="6660538" cy="461665"/>
           </a:xfrm>
           <a:prstGeom prst="rect">
@@ -5185,48 +5483,6 @@
               </a:rPr>
               <a:t>Application that searches for the shortest route between two stops in Solvro City. Including user authentication, user interface, API and city map visualization.</a:t>
             </a:r>
-          </a:p>
-        </p:txBody>
-      </p:sp>
-      <p:sp>
-        <p:nvSpPr>
-          <p:cNvPr id="74" name="pole tekstowe 73">
-            <a:extLst>
-              <a:ext uri="{FF2B5EF4-FFF2-40B4-BE49-F238E27FC236}">
-                <a16:creationId xmlns:a16="http://schemas.microsoft.com/office/drawing/2014/main" id="{5731F682-14FA-4B43-872B-D75A6A24C264}"/>
-              </a:ext>
-            </a:extLst>
-          </p:cNvPr>
-          <p:cNvSpPr txBox="1"/>
-          <p:nvPr/>
-        </p:nvSpPr>
-        <p:spPr>
-          <a:xfrm>
-            <a:off x="3827146" y="12529377"/>
-            <a:ext cx="6660538" cy="584775"/>
-          </a:xfrm>
-          <a:prstGeom prst="rect">
-            <a:avLst/>
-          </a:prstGeom>
-          <a:noFill/>
-        </p:spPr>
-        <p:txBody>
-          <a:bodyPr wrap="square" rtlCol="0">
-            <a:spAutoFit/>
-          </a:bodyPr>
-          <a:lstStyle/>
-          <a:p>
-            <a:r>
-              <a:rPr lang="en-US" sz="3200">
-                <a:latin typeface="Poppins Light" panose="00000400000000000000" pitchFamily="2" charset="0"/>
-                <a:cs typeface="Poppins Light" panose="00000400000000000000" pitchFamily="2" charset="0"/>
-              </a:rPr>
-              <a:t>Interests</a:t>
-            </a:r>
-            <a:endParaRPr lang="en-US" sz="2400">
-              <a:latin typeface="Poppins Light" panose="00000400000000000000" pitchFamily="2" charset="0"/>
-              <a:cs typeface="Poppins Light" panose="00000400000000000000" pitchFamily="2" charset="0"/>
-            </a:endParaRPr>
           </a:p>
         </p:txBody>
       </p:sp>
@@ -5244,7 +5500,7 @@
         </p:nvSpPr>
         <p:spPr>
           <a:xfrm>
-            <a:off x="3827146" y="13146311"/>
+            <a:off x="3827146" y="14202387"/>
             <a:ext cx="6660538" cy="369332"/>
           </a:xfrm>
           <a:prstGeom prst="rect">
@@ -5263,7 +5519,7 @@
                 <a:latin typeface="Poppins SemiBold" panose="00000700000000000000" pitchFamily="2" charset="0"/>
                 <a:cs typeface="Poppins SemiBold" panose="00000700000000000000" pitchFamily="2" charset="0"/>
               </a:rPr>
-              <a:t>dance, graphic design, technology, drone operation</a:t>
+              <a:t>dance, 3D printing, design, technology, drone operation</a:t>
             </a:r>
           </a:p>
         </p:txBody>
@@ -5520,6 +5776,552 @@
           <a:p>
             <a:pPr algn="ctr"/>
             <a:endParaRPr lang="en-US"/>
+          </a:p>
+        </p:txBody>
+      </p:sp>
+      <p:sp>
+        <p:nvSpPr>
+          <p:cNvPr id="54" name="pole tekstowe 53">
+            <a:extLst>
+              <a:ext uri="{FF2B5EF4-FFF2-40B4-BE49-F238E27FC236}">
+                <a16:creationId xmlns:a16="http://schemas.microsoft.com/office/drawing/2014/main" id="{63EC90A1-0D80-4165-93D5-4BDABA4DCBEB}"/>
+              </a:ext>
+            </a:extLst>
+          </p:cNvPr>
+          <p:cNvSpPr txBox="1"/>
+          <p:nvPr/>
+        </p:nvSpPr>
+        <p:spPr>
+          <a:xfrm>
+            <a:off x="3827146" y="1528436"/>
+            <a:ext cx="6660538" cy="461665"/>
+          </a:xfrm>
+          <a:prstGeom prst="rect">
+            <a:avLst/>
+          </a:prstGeom>
+          <a:noFill/>
+        </p:spPr>
+        <p:txBody>
+          <a:bodyPr wrap="square" rtlCol="0">
+            <a:spAutoFit/>
+          </a:bodyPr>
+          <a:lstStyle/>
+          <a:p>
+            <a:pPr algn="just"/>
+            <a:r>
+              <a:rPr lang="en-US" sz="1200">
+                <a:latin typeface="Poppins Light" panose="00000400000000000000" pitchFamily="2" charset="0"/>
+                <a:cs typeface="Poppins Light" panose="00000400000000000000" pitchFamily="2" charset="0"/>
+              </a:rPr>
+              <a:t>Development and sale of own software. Implementation of solutions to existing projects for several companies. Work mainly with Python, SQL, PHP, JavaScript.</a:t>
+            </a:r>
+          </a:p>
+        </p:txBody>
+      </p:sp>
+      <p:sp>
+        <p:nvSpPr>
+          <p:cNvPr id="56" name="pole tekstowe 55">
+            <a:extLst>
+              <a:ext uri="{FF2B5EF4-FFF2-40B4-BE49-F238E27FC236}">
+                <a16:creationId xmlns:a16="http://schemas.microsoft.com/office/drawing/2014/main" id="{9FCE9F84-4E50-40CC-882C-AF6889BC6608}"/>
+              </a:ext>
+            </a:extLst>
+          </p:cNvPr>
+          <p:cNvSpPr txBox="1"/>
+          <p:nvPr/>
+        </p:nvSpPr>
+        <p:spPr>
+          <a:xfrm>
+            <a:off x="3827146" y="2739006"/>
+            <a:ext cx="6660538" cy="461665"/>
+          </a:xfrm>
+          <a:prstGeom prst="rect">
+            <a:avLst/>
+          </a:prstGeom>
+          <a:noFill/>
+        </p:spPr>
+        <p:txBody>
+          <a:bodyPr wrap="square" rtlCol="0">
+            <a:spAutoFit/>
+          </a:bodyPr>
+          <a:lstStyle/>
+          <a:p>
+            <a:pPr algn="just"/>
+            <a:r>
+              <a:rPr lang="en-US" sz="1200">
+                <a:latin typeface="Poppins Light" panose="00000400000000000000" pitchFamily="2" charset="0"/>
+                <a:cs typeface="Poppins Light" panose="00000400000000000000" pitchFamily="2" charset="0"/>
+              </a:rPr>
+              <a:t>Creating, deploying and managing websites, ecommerce store, work on PK_SchoolManager project. Work mainly with HTML, CSS, JS, PHP, WordPress, Python.</a:t>
+            </a:r>
+          </a:p>
+        </p:txBody>
+      </p:sp>
+      <p:sp>
+        <p:nvSpPr>
+          <p:cNvPr id="58" name="Prostokąt 57">
+            <a:extLst>
+              <a:ext uri="{FF2B5EF4-FFF2-40B4-BE49-F238E27FC236}">
+                <a16:creationId xmlns:a16="http://schemas.microsoft.com/office/drawing/2014/main" id="{2193E162-DDFF-451E-9323-C512A99758B8}"/>
+              </a:ext>
+            </a:extLst>
+          </p:cNvPr>
+          <p:cNvSpPr/>
+          <p:nvPr/>
+        </p:nvSpPr>
+        <p:spPr>
+          <a:xfrm>
+            <a:off x="3600451" y="3618741"/>
+            <a:ext cx="2290760" cy="544522"/>
+          </a:xfrm>
+          <a:prstGeom prst="rect">
+            <a:avLst/>
+          </a:prstGeom>
+          <a:solidFill>
+            <a:schemeClr val="tx1"/>
+          </a:solidFill>
+          <a:ln>
+            <a:noFill/>
+          </a:ln>
+        </p:spPr>
+        <p:style>
+          <a:lnRef idx="2">
+            <a:schemeClr val="accent1">
+              <a:shade val="50000"/>
+            </a:schemeClr>
+          </a:lnRef>
+          <a:fillRef idx="1">
+            <a:schemeClr val="accent1"/>
+          </a:fillRef>
+          <a:effectRef idx="0">
+            <a:schemeClr val="accent1"/>
+          </a:effectRef>
+          <a:fontRef idx="minor">
+            <a:schemeClr val="lt1"/>
+          </a:fontRef>
+        </p:style>
+        <p:txBody>
+          <a:bodyPr rtlCol="0" anchor="ctr"/>
+          <a:lstStyle/>
+          <a:p>
+            <a:pPr algn="ctr"/>
+            <a:endParaRPr lang="en-US"/>
+          </a:p>
+        </p:txBody>
+      </p:sp>
+      <p:sp>
+        <p:nvSpPr>
+          <p:cNvPr id="63" name="pole tekstowe 62">
+            <a:extLst>
+              <a:ext uri="{FF2B5EF4-FFF2-40B4-BE49-F238E27FC236}">
+                <a16:creationId xmlns:a16="http://schemas.microsoft.com/office/drawing/2014/main" id="{81D11D85-7E39-4706-A14B-2A9D6A78496F}"/>
+              </a:ext>
+            </a:extLst>
+          </p:cNvPr>
+          <p:cNvSpPr txBox="1"/>
+          <p:nvPr/>
+        </p:nvSpPr>
+        <p:spPr>
+          <a:xfrm>
+            <a:off x="3815862" y="3667165"/>
+            <a:ext cx="6660538" cy="461665"/>
+          </a:xfrm>
+          <a:prstGeom prst="rect">
+            <a:avLst/>
+          </a:prstGeom>
+          <a:noFill/>
+        </p:spPr>
+        <p:txBody>
+          <a:bodyPr wrap="square" rtlCol="0">
+            <a:spAutoFit/>
+          </a:bodyPr>
+          <a:lstStyle/>
+          <a:p>
+            <a:r>
+              <a:rPr lang="en-US" sz="2400">
+                <a:solidFill>
+                  <a:schemeClr val="bg1">
+                    <a:lumMod val="95000"/>
+                  </a:schemeClr>
+                </a:solidFill>
+                <a:latin typeface="Poppins Light" panose="00000400000000000000" pitchFamily="2" charset="0"/>
+                <a:cs typeface="Poppins Light" panose="00000400000000000000" pitchFamily="2" charset="0"/>
+              </a:rPr>
+              <a:t>EDUCATION</a:t>
+            </a:r>
+            <a:endParaRPr lang="en-US">
+              <a:solidFill>
+                <a:schemeClr val="bg1">
+                  <a:lumMod val="95000"/>
+                </a:schemeClr>
+              </a:solidFill>
+              <a:latin typeface="Poppins Light" panose="00000400000000000000" pitchFamily="2" charset="0"/>
+              <a:cs typeface="Poppins Light" panose="00000400000000000000" pitchFamily="2" charset="0"/>
+            </a:endParaRPr>
+          </a:p>
+        </p:txBody>
+      </p:sp>
+      <p:sp>
+        <p:nvSpPr>
+          <p:cNvPr id="64" name="Prostokąt 63">
+            <a:extLst>
+              <a:ext uri="{FF2B5EF4-FFF2-40B4-BE49-F238E27FC236}">
+                <a16:creationId xmlns:a16="http://schemas.microsoft.com/office/drawing/2014/main" id="{88F3B9C0-9379-4056-A2B1-B2FF2E5C5942}"/>
+              </a:ext>
+            </a:extLst>
+          </p:cNvPr>
+          <p:cNvSpPr/>
+          <p:nvPr/>
+        </p:nvSpPr>
+        <p:spPr>
+          <a:xfrm>
+            <a:off x="3600450" y="6864779"/>
+            <a:ext cx="2283617" cy="544522"/>
+          </a:xfrm>
+          <a:prstGeom prst="rect">
+            <a:avLst/>
+          </a:prstGeom>
+          <a:solidFill>
+            <a:schemeClr val="tx1"/>
+          </a:solidFill>
+          <a:ln>
+            <a:noFill/>
+          </a:ln>
+        </p:spPr>
+        <p:style>
+          <a:lnRef idx="2">
+            <a:schemeClr val="accent1">
+              <a:shade val="50000"/>
+            </a:schemeClr>
+          </a:lnRef>
+          <a:fillRef idx="1">
+            <a:schemeClr val="accent1"/>
+          </a:fillRef>
+          <a:effectRef idx="0">
+            <a:schemeClr val="accent1"/>
+          </a:effectRef>
+          <a:fontRef idx="minor">
+            <a:schemeClr val="lt1"/>
+          </a:fontRef>
+        </p:style>
+        <p:txBody>
+          <a:bodyPr rtlCol="0" anchor="ctr"/>
+          <a:lstStyle/>
+          <a:p>
+            <a:pPr algn="ctr"/>
+            <a:endParaRPr lang="en-US"/>
+          </a:p>
+        </p:txBody>
+      </p:sp>
+      <p:sp>
+        <p:nvSpPr>
+          <p:cNvPr id="65" name="pole tekstowe 64">
+            <a:extLst>
+              <a:ext uri="{FF2B5EF4-FFF2-40B4-BE49-F238E27FC236}">
+                <a16:creationId xmlns:a16="http://schemas.microsoft.com/office/drawing/2014/main" id="{F360FC61-75A4-4C24-BC16-C8E274DBEABC}"/>
+              </a:ext>
+            </a:extLst>
+          </p:cNvPr>
+          <p:cNvSpPr txBox="1"/>
+          <p:nvPr/>
+        </p:nvSpPr>
+        <p:spPr>
+          <a:xfrm>
+            <a:off x="3815862" y="6913203"/>
+            <a:ext cx="6660538" cy="461665"/>
+          </a:xfrm>
+          <a:prstGeom prst="rect">
+            <a:avLst/>
+          </a:prstGeom>
+          <a:noFill/>
+        </p:spPr>
+        <p:txBody>
+          <a:bodyPr wrap="square" rtlCol="0">
+            <a:spAutoFit/>
+          </a:bodyPr>
+          <a:lstStyle/>
+          <a:p>
+            <a:r>
+              <a:rPr lang="en-US" sz="2400">
+                <a:solidFill>
+                  <a:schemeClr val="bg1">
+                    <a:lumMod val="95000"/>
+                  </a:schemeClr>
+                </a:solidFill>
+                <a:latin typeface="Poppins Light" panose="00000400000000000000" pitchFamily="2" charset="0"/>
+                <a:cs typeface="Poppins Light" panose="00000400000000000000" pitchFamily="2" charset="0"/>
+              </a:rPr>
+              <a:t>PROJECTS</a:t>
+            </a:r>
+            <a:endParaRPr lang="en-US">
+              <a:solidFill>
+                <a:schemeClr val="bg1">
+                  <a:lumMod val="95000"/>
+                </a:schemeClr>
+              </a:solidFill>
+              <a:latin typeface="Poppins Light" panose="00000400000000000000" pitchFamily="2" charset="0"/>
+              <a:cs typeface="Poppins Light" panose="00000400000000000000" pitchFamily="2" charset="0"/>
+            </a:endParaRPr>
+          </a:p>
+        </p:txBody>
+      </p:sp>
+      <p:sp>
+        <p:nvSpPr>
+          <p:cNvPr id="69" name="Prostokąt 68">
+            <a:extLst>
+              <a:ext uri="{FF2B5EF4-FFF2-40B4-BE49-F238E27FC236}">
+                <a16:creationId xmlns:a16="http://schemas.microsoft.com/office/drawing/2014/main" id="{04FB54FB-46C6-4E5B-9A9B-B34350BA7F68}"/>
+              </a:ext>
+            </a:extLst>
+          </p:cNvPr>
+          <p:cNvSpPr/>
+          <p:nvPr/>
+        </p:nvSpPr>
+        <p:spPr>
+          <a:xfrm>
+            <a:off x="3600450" y="13449976"/>
+            <a:ext cx="2290761" cy="544522"/>
+          </a:xfrm>
+          <a:prstGeom prst="rect">
+            <a:avLst/>
+          </a:prstGeom>
+          <a:solidFill>
+            <a:schemeClr val="tx1"/>
+          </a:solidFill>
+          <a:ln>
+            <a:noFill/>
+          </a:ln>
+        </p:spPr>
+        <p:style>
+          <a:lnRef idx="2">
+            <a:schemeClr val="accent1">
+              <a:shade val="50000"/>
+            </a:schemeClr>
+          </a:lnRef>
+          <a:fillRef idx="1">
+            <a:schemeClr val="accent1"/>
+          </a:fillRef>
+          <a:effectRef idx="0">
+            <a:schemeClr val="accent1"/>
+          </a:effectRef>
+          <a:fontRef idx="minor">
+            <a:schemeClr val="lt1"/>
+          </a:fontRef>
+        </p:style>
+        <p:txBody>
+          <a:bodyPr rtlCol="0" anchor="ctr"/>
+          <a:lstStyle/>
+          <a:p>
+            <a:pPr algn="ctr"/>
+            <a:endParaRPr lang="en-US"/>
+          </a:p>
+        </p:txBody>
+      </p:sp>
+      <p:sp>
+        <p:nvSpPr>
+          <p:cNvPr id="73" name="pole tekstowe 72">
+            <a:extLst>
+              <a:ext uri="{FF2B5EF4-FFF2-40B4-BE49-F238E27FC236}">
+                <a16:creationId xmlns:a16="http://schemas.microsoft.com/office/drawing/2014/main" id="{A6B72069-1C97-450B-B625-78FCB8C1423F}"/>
+              </a:ext>
+            </a:extLst>
+          </p:cNvPr>
+          <p:cNvSpPr txBox="1"/>
+          <p:nvPr/>
+        </p:nvSpPr>
+        <p:spPr>
+          <a:xfrm>
+            <a:off x="3815862" y="13498400"/>
+            <a:ext cx="6660538" cy="461665"/>
+          </a:xfrm>
+          <a:prstGeom prst="rect">
+            <a:avLst/>
+          </a:prstGeom>
+          <a:noFill/>
+        </p:spPr>
+        <p:txBody>
+          <a:bodyPr wrap="square" rtlCol="0">
+            <a:spAutoFit/>
+          </a:bodyPr>
+          <a:lstStyle/>
+          <a:p>
+            <a:r>
+              <a:rPr lang="en-US" sz="2400">
+                <a:solidFill>
+                  <a:schemeClr val="bg1">
+                    <a:lumMod val="95000"/>
+                  </a:schemeClr>
+                </a:solidFill>
+                <a:latin typeface="Poppins Light" panose="00000400000000000000" pitchFamily="2" charset="0"/>
+                <a:cs typeface="Poppins Light" panose="00000400000000000000" pitchFamily="2" charset="0"/>
+              </a:rPr>
+              <a:t>INTERESTS</a:t>
+            </a:r>
+            <a:endParaRPr lang="en-US">
+              <a:solidFill>
+                <a:schemeClr val="bg1">
+                  <a:lumMod val="95000"/>
+                </a:schemeClr>
+              </a:solidFill>
+              <a:latin typeface="Poppins Light" panose="00000400000000000000" pitchFamily="2" charset="0"/>
+              <a:cs typeface="Poppins Light" panose="00000400000000000000" pitchFamily="2" charset="0"/>
+            </a:endParaRPr>
+          </a:p>
+        </p:txBody>
+      </p:sp>
+      <p:sp>
+        <p:nvSpPr>
+          <p:cNvPr id="82" name="pole tekstowe 81">
+            <a:extLst>
+              <a:ext uri="{FF2B5EF4-FFF2-40B4-BE49-F238E27FC236}">
+                <a16:creationId xmlns:a16="http://schemas.microsoft.com/office/drawing/2014/main" id="{1A935A0B-86FA-4FD6-9473-9802F6CF1A47}"/>
+              </a:ext>
+            </a:extLst>
+          </p:cNvPr>
+          <p:cNvSpPr txBox="1"/>
+          <p:nvPr/>
+        </p:nvSpPr>
+        <p:spPr>
+          <a:xfrm>
+            <a:off x="8135376" y="7657353"/>
+            <a:ext cx="2352308" cy="369332"/>
+          </a:xfrm>
+          <a:prstGeom prst="rect">
+            <a:avLst/>
+          </a:prstGeom>
+          <a:noFill/>
+        </p:spPr>
+        <p:txBody>
+          <a:bodyPr wrap="square" rtlCol="0">
+            <a:spAutoFit/>
+          </a:bodyPr>
+          <a:lstStyle/>
+          <a:p>
+            <a:pPr algn="r"/>
+            <a:r>
+              <a:rPr lang="en-US" b="1">
+                <a:latin typeface="Poppins SemiBold" panose="00000700000000000000" pitchFamily="2" charset="0"/>
+                <a:cs typeface="Poppins SemiBold" panose="00000700000000000000" pitchFamily="2" charset="0"/>
+              </a:rPr>
+              <a:t>2015 - now</a:t>
+            </a:r>
+          </a:p>
+        </p:txBody>
+      </p:sp>
+      <p:sp>
+        <p:nvSpPr>
+          <p:cNvPr id="83" name="pole tekstowe 82">
+            <a:extLst>
+              <a:ext uri="{FF2B5EF4-FFF2-40B4-BE49-F238E27FC236}">
+                <a16:creationId xmlns:a16="http://schemas.microsoft.com/office/drawing/2014/main" id="{197C55E9-A98F-4608-98A3-4657F2B5F734}"/>
+              </a:ext>
+            </a:extLst>
+          </p:cNvPr>
+          <p:cNvSpPr txBox="1"/>
+          <p:nvPr/>
+        </p:nvSpPr>
+        <p:spPr>
+          <a:xfrm>
+            <a:off x="8135376" y="9485027"/>
+            <a:ext cx="2352308" cy="369332"/>
+          </a:xfrm>
+          <a:prstGeom prst="rect">
+            <a:avLst/>
+          </a:prstGeom>
+          <a:noFill/>
+        </p:spPr>
+        <p:txBody>
+          <a:bodyPr wrap="square" rtlCol="0">
+            <a:spAutoFit/>
+          </a:bodyPr>
+          <a:lstStyle/>
+          <a:p>
+            <a:pPr algn="r"/>
+            <a:r>
+              <a:rPr lang="en-US" b="1">
+                <a:latin typeface="Poppins SemiBold" panose="00000700000000000000" pitchFamily="2" charset="0"/>
+                <a:cs typeface="Poppins SemiBold" panose="00000700000000000000" pitchFamily="2" charset="0"/>
+              </a:rPr>
+              <a:t>2018</a:t>
+            </a:r>
+          </a:p>
+        </p:txBody>
+      </p:sp>
+      <p:sp>
+        <p:nvSpPr>
+          <p:cNvPr id="84" name="pole tekstowe 83">
+            <a:extLst>
+              <a:ext uri="{FF2B5EF4-FFF2-40B4-BE49-F238E27FC236}">
+                <a16:creationId xmlns:a16="http://schemas.microsoft.com/office/drawing/2014/main" id="{939E7C42-4CE1-4D22-8767-2138F9C567D9}"/>
+              </a:ext>
+            </a:extLst>
+          </p:cNvPr>
+          <p:cNvSpPr txBox="1"/>
+          <p:nvPr/>
+        </p:nvSpPr>
+        <p:spPr>
+          <a:xfrm>
+            <a:off x="8135376" y="10946669"/>
+            <a:ext cx="2352308" cy="369332"/>
+          </a:xfrm>
+          <a:prstGeom prst="rect">
+            <a:avLst/>
+          </a:prstGeom>
+          <a:noFill/>
+        </p:spPr>
+        <p:txBody>
+          <a:bodyPr wrap="square" rtlCol="0">
+            <a:spAutoFit/>
+          </a:bodyPr>
+          <a:lstStyle/>
+          <a:p>
+            <a:pPr algn="r"/>
+            <a:r>
+              <a:rPr lang="en-US" b="1">
+                <a:latin typeface="Poppins SemiBold" panose="00000700000000000000" pitchFamily="2" charset="0"/>
+                <a:cs typeface="Poppins SemiBold" panose="00000700000000000000" pitchFamily="2" charset="0"/>
+              </a:rPr>
+              <a:t>2015 - now</a:t>
+            </a:r>
+          </a:p>
+        </p:txBody>
+      </p:sp>
+      <p:sp>
+        <p:nvSpPr>
+          <p:cNvPr id="85" name="pole tekstowe 84">
+            <a:extLst>
+              <a:ext uri="{FF2B5EF4-FFF2-40B4-BE49-F238E27FC236}">
+                <a16:creationId xmlns:a16="http://schemas.microsoft.com/office/drawing/2014/main" id="{F3662C13-683A-4523-B6FC-1F20388C028E}"/>
+              </a:ext>
+            </a:extLst>
+          </p:cNvPr>
+          <p:cNvSpPr txBox="1"/>
+          <p:nvPr/>
+        </p:nvSpPr>
+        <p:spPr>
+          <a:xfrm>
+            <a:off x="8135376" y="12023281"/>
+            <a:ext cx="2352308" cy="369332"/>
+          </a:xfrm>
+          <a:prstGeom prst="rect">
+            <a:avLst/>
+          </a:prstGeom>
+          <a:noFill/>
+        </p:spPr>
+        <p:txBody>
+          <a:bodyPr wrap="square" rtlCol="0">
+            <a:spAutoFit/>
+          </a:bodyPr>
+          <a:lstStyle/>
+          <a:p>
+            <a:pPr algn="r"/>
+            <a:r>
+              <a:rPr lang="en-US" b="1">
+                <a:latin typeface="Poppins SemiBold" panose="00000700000000000000" pitchFamily="2" charset="0"/>
+                <a:cs typeface="Poppins SemiBold" panose="00000700000000000000" pitchFamily="2" charset="0"/>
+              </a:rPr>
+              <a:t>2020</a:t>
+            </a:r>
           </a:p>
         </p:txBody>
       </p:sp>

--- a/assets/ppt/PK_CV.pptx
+++ b/assets/ppt/PK_CV.pptx
@@ -243,7 +243,7 @@
           <a:p>
             <a:fld id="{FEA1A487-9522-4098-8ABE-F66374D5ED78}" type="datetimeFigureOut">
               <a:rPr lang="en-US" smtClean="0"/>
-              <a:t>2020-12-19</a:t>
+              <a:t>2021-02-01</a:t>
             </a:fld>
             <a:endParaRPr lang="en-US"/>
           </a:p>
@@ -413,7 +413,7 @@
           <a:p>
             <a:fld id="{FEA1A487-9522-4098-8ABE-F66374D5ED78}" type="datetimeFigureOut">
               <a:rPr lang="en-US" smtClean="0"/>
-              <a:t>2020-12-19</a:t>
+              <a:t>2021-02-01</a:t>
             </a:fld>
             <a:endParaRPr lang="en-US"/>
           </a:p>
@@ -593,7 +593,7 @@
           <a:p>
             <a:fld id="{FEA1A487-9522-4098-8ABE-F66374D5ED78}" type="datetimeFigureOut">
               <a:rPr lang="en-US" smtClean="0"/>
-              <a:t>2020-12-19</a:t>
+              <a:t>2021-02-01</a:t>
             </a:fld>
             <a:endParaRPr lang="en-US"/>
           </a:p>
@@ -763,7 +763,7 @@
           <a:p>
             <a:fld id="{FEA1A487-9522-4098-8ABE-F66374D5ED78}" type="datetimeFigureOut">
               <a:rPr lang="en-US" smtClean="0"/>
-              <a:t>2020-12-19</a:t>
+              <a:t>2021-02-01</a:t>
             </a:fld>
             <a:endParaRPr lang="en-US"/>
           </a:p>
@@ -1007,7 +1007,7 @@
           <a:p>
             <a:fld id="{FEA1A487-9522-4098-8ABE-F66374D5ED78}" type="datetimeFigureOut">
               <a:rPr lang="en-US" smtClean="0"/>
-              <a:t>2020-12-19</a:t>
+              <a:t>2021-02-01</a:t>
             </a:fld>
             <a:endParaRPr lang="en-US"/>
           </a:p>
@@ -1239,7 +1239,7 @@
           <a:p>
             <a:fld id="{FEA1A487-9522-4098-8ABE-F66374D5ED78}" type="datetimeFigureOut">
               <a:rPr lang="en-US" smtClean="0"/>
-              <a:t>2020-12-19</a:t>
+              <a:t>2021-02-01</a:t>
             </a:fld>
             <a:endParaRPr lang="en-US"/>
           </a:p>
@@ -1606,7 +1606,7 @@
           <a:p>
             <a:fld id="{FEA1A487-9522-4098-8ABE-F66374D5ED78}" type="datetimeFigureOut">
               <a:rPr lang="en-US" smtClean="0"/>
-              <a:t>2020-12-19</a:t>
+              <a:t>2021-02-01</a:t>
             </a:fld>
             <a:endParaRPr lang="en-US"/>
           </a:p>
@@ -1724,7 +1724,7 @@
           <a:p>
             <a:fld id="{FEA1A487-9522-4098-8ABE-F66374D5ED78}" type="datetimeFigureOut">
               <a:rPr lang="en-US" smtClean="0"/>
-              <a:t>2020-12-19</a:t>
+              <a:t>2021-02-01</a:t>
             </a:fld>
             <a:endParaRPr lang="en-US"/>
           </a:p>
@@ -1819,7 +1819,7 @@
           <a:p>
             <a:fld id="{FEA1A487-9522-4098-8ABE-F66374D5ED78}" type="datetimeFigureOut">
               <a:rPr lang="en-US" smtClean="0"/>
-              <a:t>2020-12-19</a:t>
+              <a:t>2021-02-01</a:t>
             </a:fld>
             <a:endParaRPr lang="en-US"/>
           </a:p>
@@ -2096,7 +2096,7 @@
           <a:p>
             <a:fld id="{FEA1A487-9522-4098-8ABE-F66374D5ED78}" type="datetimeFigureOut">
               <a:rPr lang="en-US" smtClean="0"/>
-              <a:t>2020-12-19</a:t>
+              <a:t>2021-02-01</a:t>
             </a:fld>
             <a:endParaRPr lang="en-US"/>
           </a:p>
@@ -2353,7 +2353,7 @@
           <a:p>
             <a:fld id="{FEA1A487-9522-4098-8ABE-F66374D5ED78}" type="datetimeFigureOut">
               <a:rPr lang="en-US" smtClean="0"/>
-              <a:t>2020-12-19</a:t>
+              <a:t>2021-02-01</a:t>
             </a:fld>
             <a:endParaRPr lang="en-US"/>
           </a:p>
@@ -2566,7 +2566,7 @@
           <a:p>
             <a:fld id="{FEA1A487-9522-4098-8ABE-F66374D5ED78}" type="datetimeFigureOut">
               <a:rPr lang="en-US" smtClean="0"/>
-              <a:t>2020-12-19</a:t>
+              <a:t>2021-02-01</a:t>
             </a:fld>
             <a:endParaRPr lang="en-US"/>
           </a:p>
@@ -3705,7 +3705,7 @@
         <p:spPr>
           <a:xfrm>
             <a:off x="160020" y="8811081"/>
-            <a:ext cx="3280410" cy="1631216"/>
+            <a:ext cx="3280410" cy="1877437"/>
           </a:xfrm>
           <a:prstGeom prst="rect">
             <a:avLst/>
@@ -3759,6 +3759,47 @@
               </a:rPr>
               <a:t>2016 - now</a:t>
             </a:r>
+          </a:p>
+          <a:p>
+            <a:pPr marL="285750" indent="-285750">
+              <a:buFont typeface="Wingdings" panose="05000000000000000000" pitchFamily="2" charset="2"/>
+              <a:buChar char="§"/>
+            </a:pPr>
+            <a:r>
+              <a:rPr lang="en-US" sz="1600">
+                <a:solidFill>
+                  <a:schemeClr val="bg1">
+                    <a:lumMod val="85000"/>
+                  </a:schemeClr>
+                </a:solidFill>
+                <a:latin typeface="Poppins Light" panose="00000400000000000000" pitchFamily="2" charset="0"/>
+                <a:cs typeface="Poppins Light" panose="00000400000000000000" pitchFamily="2" charset="0"/>
+              </a:rPr>
+              <a:t>PHP </a:t>
+            </a:r>
+            <a:r>
+              <a:rPr lang="en-US" sz="800">
+                <a:solidFill>
+                  <a:schemeClr val="tx1">
+                    <a:lumMod val="75000"/>
+                    <a:lumOff val="25000"/>
+                  </a:schemeClr>
+                </a:solidFill>
+                <a:latin typeface="Poppins Light" panose="00000400000000000000" pitchFamily="2" charset="0"/>
+                <a:cs typeface="Poppins Light" panose="00000400000000000000" pitchFamily="2" charset="0"/>
+              </a:rPr>
+              <a:t>2015 - 2020</a:t>
+            </a:r>
+            <a:endParaRPr lang="en-US" sz="1600">
+              <a:solidFill>
+                <a:schemeClr val="tx1">
+                  <a:lumMod val="75000"/>
+                  <a:lumOff val="25000"/>
+                </a:schemeClr>
+              </a:solidFill>
+              <a:latin typeface="Poppins Light" panose="00000400000000000000" pitchFamily="2" charset="0"/>
+              <a:cs typeface="Poppins Light" panose="00000400000000000000" pitchFamily="2" charset="0"/>
+            </a:endParaRPr>
           </a:p>
           <a:p>
             <a:pPr marL="285750" indent="-285750">
@@ -4038,8 +4079,8 @@
         </p:nvSpPr>
         <p:spPr>
           <a:xfrm>
-            <a:off x="160020" y="10643598"/>
-            <a:ext cx="3280410" cy="2123658"/>
+            <a:off x="160020" y="11081347"/>
+            <a:ext cx="3280410" cy="1877437"/>
           </a:xfrm>
           <a:prstGeom prst="rect">
             <a:avLst/>
@@ -4093,19 +4134,16 @@
               </a:rPr>
               <a:t>basics</a:t>
             </a:r>
-            <a:r>
-              <a:rPr lang="en-US" sz="1600">
-                <a:solidFill>
-                  <a:schemeClr val="tx1">
-                    <a:lumMod val="75000"/>
-                    <a:lumOff val="25000"/>
-                  </a:schemeClr>
-                </a:solidFill>
-                <a:latin typeface="Poppins Light" panose="00000400000000000000" pitchFamily="2" charset="0"/>
-                <a:cs typeface="Poppins Light" panose="00000400000000000000" pitchFamily="2" charset="0"/>
-              </a:rPr>
-              <a:t> </a:t>
-            </a:r>
+            <a:endParaRPr lang="en-US" sz="1600">
+              <a:solidFill>
+                <a:schemeClr val="tx1">
+                  <a:lumMod val="75000"/>
+                  <a:lumOff val="25000"/>
+                </a:schemeClr>
+              </a:solidFill>
+              <a:latin typeface="Poppins Light" panose="00000400000000000000" pitchFamily="2" charset="0"/>
+              <a:cs typeface="Poppins Light" panose="00000400000000000000" pitchFamily="2" charset="0"/>
+            </a:endParaRPr>
           </a:p>
           <a:p>
             <a:pPr marL="285750" indent="-285750">
@@ -4212,38 +4250,7 @@
                 <a:latin typeface="Poppins Light" panose="00000400000000000000" pitchFamily="2" charset="0"/>
                 <a:cs typeface="Poppins Light" panose="00000400000000000000" pitchFamily="2" charset="0"/>
               </a:rPr>
-              <a:t>Java </a:t>
-            </a:r>
-            <a:r>
-              <a:rPr lang="en-US" sz="800">
-                <a:solidFill>
-                  <a:schemeClr val="tx1">
-                    <a:lumMod val="75000"/>
-                    <a:lumOff val="25000"/>
-                  </a:schemeClr>
-                </a:solidFill>
-                <a:latin typeface="Poppins Light" panose="00000400000000000000" pitchFamily="2" charset="0"/>
-                <a:cs typeface="Poppins Light" panose="00000400000000000000" pitchFamily="2" charset="0"/>
-              </a:rPr>
-              <a:t>basics</a:t>
-            </a:r>
-          </a:p>
-          <a:p>
-            <a:pPr marL="285750" indent="-285750">
-              <a:buFont typeface="Wingdings" panose="05000000000000000000" pitchFamily="2" charset="2"/>
-              <a:buChar char="§"/>
-            </a:pPr>
-            <a:r>
-              <a:rPr lang="en-US" sz="1600">
-                <a:solidFill>
-                  <a:schemeClr val="bg1">
-                    <a:lumMod val="85000"/>
-                  </a:schemeClr>
-                </a:solidFill>
-                <a:latin typeface="Poppins Light" panose="00000400000000000000" pitchFamily="2" charset="0"/>
-                <a:cs typeface="Poppins Light" panose="00000400000000000000" pitchFamily="2" charset="0"/>
-              </a:rPr>
-              <a:t>C++ </a:t>
+              <a:t>C++, Java, Scala </a:t>
             </a:r>
             <a:r>
               <a:rPr lang="en-US" sz="800">
@@ -4536,7 +4543,7 @@
         </p:nvSpPr>
         <p:spPr>
           <a:xfrm>
-            <a:off x="3815862" y="933565"/>
+            <a:off x="3815862" y="2136860"/>
             <a:ext cx="4308230" cy="369332"/>
           </a:xfrm>
           <a:prstGeom prst="rect">
@@ -4574,7 +4581,7 @@
         </p:nvSpPr>
         <p:spPr>
           <a:xfrm>
-            <a:off x="8124092" y="933565"/>
+            <a:off x="8124092" y="2136860"/>
             <a:ext cx="2352308" cy="369332"/>
           </a:xfrm>
           <a:prstGeom prst="rect">
@@ -4613,7 +4620,7 @@
         </p:nvSpPr>
         <p:spPr>
           <a:xfrm>
-            <a:off x="3815862" y="1242155"/>
+            <a:off x="3815862" y="2445450"/>
             <a:ext cx="6660538" cy="338554"/>
           </a:xfrm>
           <a:prstGeom prst="rect">
@@ -4657,7 +4664,7 @@
         </p:nvSpPr>
         <p:spPr>
           <a:xfrm>
-            <a:off x="3815862" y="2160313"/>
+            <a:off x="3815862" y="3363608"/>
             <a:ext cx="4308230" cy="369332"/>
           </a:xfrm>
           <a:prstGeom prst="rect">
@@ -4695,7 +4702,7 @@
         </p:nvSpPr>
         <p:spPr>
           <a:xfrm>
-            <a:off x="8124092" y="2160313"/>
+            <a:off x="8124092" y="3363608"/>
             <a:ext cx="2352308" cy="369332"/>
           </a:xfrm>
           <a:prstGeom prst="rect">
@@ -4734,7 +4741,7 @@
         </p:nvSpPr>
         <p:spPr>
           <a:xfrm>
-            <a:off x="3815862" y="2444469"/>
+            <a:off x="3815862" y="3647764"/>
             <a:ext cx="6660538" cy="338554"/>
           </a:xfrm>
           <a:prstGeom prst="rect">
@@ -4778,7 +4785,7 @@
         </p:nvSpPr>
         <p:spPr>
           <a:xfrm>
-            <a:off x="3827146" y="4407521"/>
+            <a:off x="3827146" y="5422259"/>
             <a:ext cx="4308230" cy="646331"/>
           </a:xfrm>
           <a:prstGeom prst="rect">
@@ -4816,7 +4823,7 @@
         </p:nvSpPr>
         <p:spPr>
           <a:xfrm>
-            <a:off x="8135376" y="4407521"/>
+            <a:off x="8135376" y="5422259"/>
             <a:ext cx="2352308" cy="369332"/>
           </a:xfrm>
           <a:prstGeom prst="rect">
@@ -4855,7 +4862,7 @@
         </p:nvSpPr>
         <p:spPr>
           <a:xfrm>
-            <a:off x="3827146" y="4999127"/>
+            <a:off x="3827146" y="6013865"/>
             <a:ext cx="6660538" cy="584775"/>
           </a:xfrm>
           <a:prstGeom prst="rect">
@@ -4899,7 +4906,7 @@
         </p:nvSpPr>
         <p:spPr>
           <a:xfrm>
-            <a:off x="3827146" y="5822432"/>
+            <a:off x="3827146" y="6837170"/>
             <a:ext cx="4308230" cy="369332"/>
           </a:xfrm>
           <a:prstGeom prst="rect">
@@ -4937,7 +4944,7 @@
         </p:nvSpPr>
         <p:spPr>
           <a:xfrm>
-            <a:off x="8135376" y="5822432"/>
+            <a:off x="8135376" y="6837170"/>
             <a:ext cx="2352308" cy="369332"/>
           </a:xfrm>
           <a:prstGeom prst="rect">
@@ -4976,7 +4983,7 @@
         </p:nvSpPr>
         <p:spPr>
           <a:xfrm>
-            <a:off x="3827146" y="6106588"/>
+            <a:off x="3827146" y="7121326"/>
             <a:ext cx="6660538" cy="338554"/>
           </a:xfrm>
           <a:prstGeom prst="rect">
@@ -5020,7 +5027,7 @@
         </p:nvSpPr>
         <p:spPr>
           <a:xfrm>
-            <a:off x="3827146" y="7656042"/>
+            <a:off x="3827146" y="8670780"/>
             <a:ext cx="4308230" cy="369332"/>
           </a:xfrm>
           <a:prstGeom prst="rect">
@@ -5058,7 +5065,7 @@
         </p:nvSpPr>
         <p:spPr>
           <a:xfrm>
-            <a:off x="3827146" y="7940198"/>
+            <a:off x="3827146" y="8954936"/>
             <a:ext cx="6660538" cy="338554"/>
           </a:xfrm>
           <a:prstGeom prst="rect">
@@ -5101,7 +5108,7 @@
         </p:nvSpPr>
         <p:spPr>
           <a:xfrm>
-            <a:off x="3827146" y="8204747"/>
+            <a:off x="3827146" y="9219485"/>
             <a:ext cx="6660538" cy="1015663"/>
           </a:xfrm>
           <a:prstGeom prst="rect">
@@ -5140,7 +5147,7 @@
         </p:nvSpPr>
         <p:spPr>
           <a:xfrm>
-            <a:off x="3827146" y="9480105"/>
+            <a:off x="3827146" y="10494843"/>
             <a:ext cx="4308230" cy="369332"/>
           </a:xfrm>
           <a:prstGeom prst="rect">
@@ -5178,7 +5185,7 @@
         </p:nvSpPr>
         <p:spPr>
           <a:xfrm>
-            <a:off x="3827146" y="9757548"/>
+            <a:off x="3827146" y="10772286"/>
             <a:ext cx="6660538" cy="338554"/>
           </a:xfrm>
           <a:prstGeom prst="rect">
@@ -5221,7 +5228,7 @@
         </p:nvSpPr>
         <p:spPr>
           <a:xfrm>
-            <a:off x="3827146" y="10028810"/>
+            <a:off x="3827146" y="11043548"/>
             <a:ext cx="6660538" cy="646331"/>
           </a:xfrm>
           <a:prstGeom prst="rect">
@@ -5260,7 +5267,7 @@
         </p:nvSpPr>
         <p:spPr>
           <a:xfrm>
-            <a:off x="3827146" y="10939690"/>
+            <a:off x="3827146" y="11800524"/>
             <a:ext cx="4308230" cy="369332"/>
           </a:xfrm>
           <a:prstGeom prst="rect">
@@ -5298,7 +5305,7 @@
         </p:nvSpPr>
         <p:spPr>
           <a:xfrm>
-            <a:off x="3827146" y="11223846"/>
+            <a:off x="3827146" y="12084680"/>
             <a:ext cx="6660538" cy="338554"/>
           </a:xfrm>
           <a:prstGeom prst="rect">
@@ -5323,45 +5330,6 @@
                 <a:cs typeface="Poppins Light" panose="00000400000000000000" pitchFamily="2" charset="0"/>
               </a:rPr>
               <a:t>HTML, CSS, Bootstrap</a:t>
-            </a:r>
-          </a:p>
-        </p:txBody>
-      </p:sp>
-      <p:sp>
-        <p:nvSpPr>
-          <p:cNvPr id="68" name="pole tekstowe 67">
-            <a:extLst>
-              <a:ext uri="{FF2B5EF4-FFF2-40B4-BE49-F238E27FC236}">
-                <a16:creationId xmlns:a16="http://schemas.microsoft.com/office/drawing/2014/main" id="{E39D167A-C1DD-4779-87EA-C207688A6867}"/>
-              </a:ext>
-            </a:extLst>
-          </p:cNvPr>
-          <p:cNvSpPr txBox="1"/>
-          <p:nvPr/>
-        </p:nvSpPr>
-        <p:spPr>
-          <a:xfrm>
-            <a:off x="3827146" y="11488395"/>
-            <a:ext cx="6660538" cy="276999"/>
-          </a:xfrm>
-          <a:prstGeom prst="rect">
-            <a:avLst/>
-          </a:prstGeom>
-          <a:noFill/>
-        </p:spPr>
-        <p:txBody>
-          <a:bodyPr wrap="square" rtlCol="0">
-            <a:spAutoFit/>
-          </a:bodyPr>
-          <a:lstStyle/>
-          <a:p>
-            <a:pPr algn="just"/>
-            <a:r>
-              <a:rPr lang="en-US" sz="1200">
-                <a:latin typeface="Poppins Light" panose="00000400000000000000" pitchFamily="2" charset="0"/>
-                <a:cs typeface="Poppins Light" panose="00000400000000000000" pitchFamily="2" charset="0"/>
-              </a:rPr>
-              <a:t>Scorpion Dance Team website.</a:t>
             </a:r>
           </a:p>
         </p:txBody>
@@ -5380,7 +5348,7 @@
         </p:nvSpPr>
         <p:spPr>
           <a:xfrm>
-            <a:off x="3827146" y="12021628"/>
+            <a:off x="3827146" y="12526640"/>
             <a:ext cx="4308230" cy="369332"/>
           </a:xfrm>
           <a:prstGeom prst="rect">
@@ -5418,7 +5386,7 @@
         </p:nvSpPr>
         <p:spPr>
           <a:xfrm>
-            <a:off x="3827146" y="12305784"/>
+            <a:off x="3827146" y="12810796"/>
             <a:ext cx="6660538" cy="338554"/>
           </a:xfrm>
           <a:prstGeom prst="rect">
@@ -5443,45 +5411,6 @@
                 <a:cs typeface="Poppins Light" panose="00000400000000000000" pitchFamily="2" charset="0"/>
               </a:rPr>
               <a:t>Python, Django, HTML, CSS, Bootstrap</a:t>
-            </a:r>
-          </a:p>
-        </p:txBody>
-      </p:sp>
-      <p:sp>
-        <p:nvSpPr>
-          <p:cNvPr id="72" name="pole tekstowe 71">
-            <a:extLst>
-              <a:ext uri="{FF2B5EF4-FFF2-40B4-BE49-F238E27FC236}">
-                <a16:creationId xmlns:a16="http://schemas.microsoft.com/office/drawing/2014/main" id="{BBDB1A1B-A7C4-44E8-B2C3-9DEDA8D2E28D}"/>
-              </a:ext>
-            </a:extLst>
-          </p:cNvPr>
-          <p:cNvSpPr txBox="1"/>
-          <p:nvPr/>
-        </p:nvSpPr>
-        <p:spPr>
-          <a:xfrm>
-            <a:off x="3827146" y="12570333"/>
-            <a:ext cx="6660538" cy="461665"/>
-          </a:xfrm>
-          <a:prstGeom prst="rect">
-            <a:avLst/>
-          </a:prstGeom>
-          <a:noFill/>
-        </p:spPr>
-        <p:txBody>
-          <a:bodyPr wrap="square" rtlCol="0">
-            <a:spAutoFit/>
-          </a:bodyPr>
-          <a:lstStyle/>
-          <a:p>
-            <a:pPr algn="just"/>
-            <a:r>
-              <a:rPr lang="en-US" sz="1200">
-                <a:latin typeface="Poppins Light" panose="00000400000000000000" pitchFamily="2" charset="0"/>
-                <a:cs typeface="Poppins Light" panose="00000400000000000000" pitchFamily="2" charset="0"/>
-              </a:rPr>
-              <a:t>Application that searches for the shortest route between two stops in Solvro City. Including user authentication, user interface, API and city map visualization.</a:t>
             </a:r>
           </a:p>
         </p:txBody>
@@ -5793,7 +5722,7 @@
         </p:nvSpPr>
         <p:spPr>
           <a:xfrm>
-            <a:off x="3827146" y="1528436"/>
+            <a:off x="3827146" y="2731731"/>
             <a:ext cx="6660538" cy="461665"/>
           </a:xfrm>
           <a:prstGeom prst="rect">
@@ -5832,7 +5761,7 @@
         </p:nvSpPr>
         <p:spPr>
           <a:xfrm>
-            <a:off x="3827146" y="2739006"/>
+            <a:off x="3827146" y="3942301"/>
             <a:ext cx="6660538" cy="461665"/>
           </a:xfrm>
           <a:prstGeom prst="rect">
@@ -5871,7 +5800,7 @@
         </p:nvSpPr>
         <p:spPr>
           <a:xfrm>
-            <a:off x="3600451" y="3618741"/>
+            <a:off x="3600451" y="4633479"/>
             <a:ext cx="2290760" cy="544522"/>
           </a:xfrm>
           <a:prstGeom prst="rect">
@@ -5923,7 +5852,7 @@
         </p:nvSpPr>
         <p:spPr>
           <a:xfrm>
-            <a:off x="3815862" y="3667165"/>
+            <a:off x="3815862" y="4681903"/>
             <a:ext cx="6660538" cy="461665"/>
           </a:xfrm>
           <a:prstGeom prst="rect">
@@ -5975,7 +5904,7 @@
         </p:nvSpPr>
         <p:spPr>
           <a:xfrm>
-            <a:off x="3600450" y="6864779"/>
+            <a:off x="3600450" y="7879517"/>
             <a:ext cx="2283617" cy="544522"/>
           </a:xfrm>
           <a:prstGeom prst="rect">
@@ -6027,7 +5956,7 @@
         </p:nvSpPr>
         <p:spPr>
           <a:xfrm>
-            <a:off x="3815862" y="6913203"/>
+            <a:off x="3815862" y="7927941"/>
             <a:ext cx="6660538" cy="461665"/>
           </a:xfrm>
           <a:prstGeom prst="rect">
@@ -6183,7 +6112,7 @@
         </p:nvSpPr>
         <p:spPr>
           <a:xfrm>
-            <a:off x="8135376" y="7657353"/>
+            <a:off x="8135376" y="8672091"/>
             <a:ext cx="2352308" cy="369332"/>
           </a:xfrm>
           <a:prstGeom prst="rect">
@@ -6222,7 +6151,7 @@
         </p:nvSpPr>
         <p:spPr>
           <a:xfrm>
-            <a:off x="8135376" y="9485027"/>
+            <a:off x="8135376" y="10499765"/>
             <a:ext cx="2352308" cy="369332"/>
           </a:xfrm>
           <a:prstGeom prst="rect">
@@ -6261,7 +6190,7 @@
         </p:nvSpPr>
         <p:spPr>
           <a:xfrm>
-            <a:off x="8135376" y="10946669"/>
+            <a:off x="8135376" y="11807503"/>
             <a:ext cx="2352308" cy="369332"/>
           </a:xfrm>
           <a:prstGeom prst="rect">
@@ -6300,7 +6229,7 @@
         </p:nvSpPr>
         <p:spPr>
           <a:xfrm>
-            <a:off x="8135376" y="12023281"/>
+            <a:off x="8135376" y="12528293"/>
             <a:ext cx="2352308" cy="369332"/>
           </a:xfrm>
           <a:prstGeom prst="rect">
@@ -6321,6 +6250,166 @@
                 <a:cs typeface="Poppins SemiBold" panose="00000700000000000000" pitchFamily="2" charset="0"/>
               </a:rPr>
               <a:t>2020</a:t>
+            </a:r>
+          </a:p>
+        </p:txBody>
+      </p:sp>
+      <p:sp>
+        <p:nvSpPr>
+          <p:cNvPr id="74" name="pole tekstowe 73">
+            <a:extLst>
+              <a:ext uri="{FF2B5EF4-FFF2-40B4-BE49-F238E27FC236}">
+                <a16:creationId xmlns:a16="http://schemas.microsoft.com/office/drawing/2014/main" id="{6827B56B-6959-4D7D-B426-C8F673727827}"/>
+              </a:ext>
+            </a:extLst>
+          </p:cNvPr>
+          <p:cNvSpPr txBox="1"/>
+          <p:nvPr/>
+        </p:nvSpPr>
+        <p:spPr>
+          <a:xfrm>
+            <a:off x="3815862" y="879451"/>
+            <a:ext cx="4308230" cy="369332"/>
+          </a:xfrm>
+          <a:prstGeom prst="rect">
+            <a:avLst/>
+          </a:prstGeom>
+          <a:noFill/>
+        </p:spPr>
+        <p:txBody>
+          <a:bodyPr wrap="square" rtlCol="0">
+            <a:spAutoFit/>
+          </a:bodyPr>
+          <a:lstStyle/>
+          <a:p>
+            <a:r>
+              <a:rPr lang="en-US">
+                <a:latin typeface="Poppins SemiBold" panose="00000700000000000000" pitchFamily="2" charset="0"/>
+                <a:cs typeface="Poppins SemiBold" panose="00000700000000000000" pitchFamily="2" charset="0"/>
+              </a:rPr>
+              <a:t>Python Developer</a:t>
+            </a:r>
+          </a:p>
+        </p:txBody>
+      </p:sp>
+      <p:sp>
+        <p:nvSpPr>
+          <p:cNvPr id="76" name="pole tekstowe 75">
+            <a:extLst>
+              <a:ext uri="{FF2B5EF4-FFF2-40B4-BE49-F238E27FC236}">
+                <a16:creationId xmlns:a16="http://schemas.microsoft.com/office/drawing/2014/main" id="{65335A40-377E-490A-9F8F-991495922CEF}"/>
+              </a:ext>
+            </a:extLst>
+          </p:cNvPr>
+          <p:cNvSpPr txBox="1"/>
+          <p:nvPr/>
+        </p:nvSpPr>
+        <p:spPr>
+          <a:xfrm>
+            <a:off x="8124092" y="879451"/>
+            <a:ext cx="2352308" cy="369332"/>
+          </a:xfrm>
+          <a:prstGeom prst="rect">
+            <a:avLst/>
+          </a:prstGeom>
+          <a:noFill/>
+        </p:spPr>
+        <p:txBody>
+          <a:bodyPr wrap="square" rtlCol="0">
+            <a:spAutoFit/>
+          </a:bodyPr>
+          <a:lstStyle/>
+          <a:p>
+            <a:pPr algn="r"/>
+            <a:r>
+              <a:rPr lang="en-US" b="1">
+                <a:latin typeface="Poppins SemiBold" panose="00000700000000000000" pitchFamily="2" charset="0"/>
+                <a:cs typeface="Poppins SemiBold" panose="00000700000000000000" pitchFamily="2" charset="0"/>
+              </a:rPr>
+              <a:t>02.2021 - now</a:t>
+            </a:r>
+          </a:p>
+        </p:txBody>
+      </p:sp>
+      <p:sp>
+        <p:nvSpPr>
+          <p:cNvPr id="77" name="pole tekstowe 76">
+            <a:extLst>
+              <a:ext uri="{FF2B5EF4-FFF2-40B4-BE49-F238E27FC236}">
+                <a16:creationId xmlns:a16="http://schemas.microsoft.com/office/drawing/2014/main" id="{DCF64990-CD5E-4007-B99A-34CED401CC76}"/>
+              </a:ext>
+            </a:extLst>
+          </p:cNvPr>
+          <p:cNvSpPr txBox="1"/>
+          <p:nvPr/>
+        </p:nvSpPr>
+        <p:spPr>
+          <a:xfrm>
+            <a:off x="3815862" y="1188041"/>
+            <a:ext cx="6660538" cy="338554"/>
+          </a:xfrm>
+          <a:prstGeom prst="rect">
+            <a:avLst/>
+          </a:prstGeom>
+          <a:noFill/>
+        </p:spPr>
+        <p:txBody>
+          <a:bodyPr wrap="square" rtlCol="0">
+            <a:spAutoFit/>
+          </a:bodyPr>
+          <a:lstStyle/>
+          <a:p>
+            <a:pPr algn="just"/>
+            <a:r>
+              <a:rPr lang="en-US" sz="1600">
+                <a:solidFill>
+                  <a:schemeClr val="bg1">
+                    <a:lumMod val="50000"/>
+                  </a:schemeClr>
+                </a:solidFill>
+                <a:latin typeface="Poppins Light" panose="00000400000000000000" pitchFamily="2" charset="0"/>
+                <a:cs typeface="Poppins Light" panose="00000400000000000000" pitchFamily="2" charset="0"/>
+              </a:rPr>
+              <a:t>Seargin by order of Roche (Contract)</a:t>
+            </a:r>
+          </a:p>
+        </p:txBody>
+      </p:sp>
+      <p:sp>
+        <p:nvSpPr>
+          <p:cNvPr id="87" name="pole tekstowe 86">
+            <a:extLst>
+              <a:ext uri="{FF2B5EF4-FFF2-40B4-BE49-F238E27FC236}">
+                <a16:creationId xmlns:a16="http://schemas.microsoft.com/office/drawing/2014/main" id="{E3E15890-76FB-4A78-906F-6031ACD8285C}"/>
+              </a:ext>
+            </a:extLst>
+          </p:cNvPr>
+          <p:cNvSpPr txBox="1"/>
+          <p:nvPr/>
+        </p:nvSpPr>
+        <p:spPr>
+          <a:xfrm>
+            <a:off x="3827146" y="1474322"/>
+            <a:ext cx="6660538" cy="461665"/>
+          </a:xfrm>
+          <a:prstGeom prst="rect">
+            <a:avLst/>
+          </a:prstGeom>
+          <a:noFill/>
+        </p:spPr>
+        <p:txBody>
+          <a:bodyPr wrap="square" rtlCol="0">
+            <a:spAutoFit/>
+          </a:bodyPr>
+          <a:lstStyle/>
+          <a:p>
+            <a:pPr algn="just"/>
+            <a:r>
+              <a:rPr lang="en-US" sz="1200">
+                <a:latin typeface="Poppins Light" panose="00000400000000000000" pitchFamily="2" charset="0"/>
+                <a:cs typeface="Poppins Light" panose="00000400000000000000" pitchFamily="2" charset="0"/>
+              </a:rPr>
+              <a:t>Developing, designing, implementing and documenting applications with Python at the backend.</a:t>
             </a:r>
           </a:p>
         </p:txBody>
